--- a/figures/ppt/研究框架-精简.pptx
+++ b/figures/ppt/研究框架-精简.pptx
@@ -3252,7 +3252,7 @@
                   <a:schemeClr val="tx1"/>
                 </a:solidFill>
               </a:rPr>
-              <a:t>（</a:t>
+              <a:t>（第</a:t>
             </a:r>
             <a:r>
               <a:rPr lang="zh-CN" altLang="en-US" b="1">
@@ -3260,7 +3260,7 @@
                   <a:schemeClr val="tx1"/>
                 </a:solidFill>
               </a:rPr>
-              <a:t>第六章）</a:t>
+              <a:t>七章）</a:t>
             </a:r>
             <a:endParaRPr lang="zh-CN" altLang="en-US" b="1">
               <a:solidFill>
@@ -3325,7 +3325,7 @@
         </p:nvSpPr>
         <p:spPr>
           <a:xfrm>
-            <a:off x="1950720" y="2633980"/>
+            <a:off x="1950720" y="2065655"/>
             <a:ext cx="517525" cy="2461260"/>
           </a:xfrm>
           <a:prstGeom prst="rect">
@@ -4779,7 +4779,11 @@
             <a:pPr algn="ctr"/>
             <a:r>
               <a:rPr lang="zh-CN" altLang="en-US" sz="1600" b="1"/>
-              <a:t>基于局部公平性估计的分布式协作接入切换机制（第三章）</a:t>
+              <a:t>基于局部公平性估计的分布式协作接入切换机制（第</a:t>
+            </a:r>
+            <a:r>
+              <a:rPr lang="zh-CN" altLang="en-US" sz="1600" b="1"/>
+              <a:t>四章）</a:t>
             </a:r>
             <a:endParaRPr lang="zh-CN" altLang="en-US" sz="1600" b="1"/>
           </a:p>
@@ -5233,11 +5237,11 @@
             </a:r>
             <a:r>
               <a:rPr lang="zh-CN" altLang="en-US" sz="1600" b="1"/>
-              <a:t>分层协作优化</a:t>
+              <a:t>分层协作优化框架（第</a:t>
             </a:r>
             <a:r>
               <a:rPr lang="zh-CN" altLang="en-US" sz="1600" b="1"/>
-              <a:t>框架（第四章</a:t>
+              <a:t>五章</a:t>
             </a:r>
             <a:r>
               <a:rPr lang="zh-CN" altLang="en-US" sz="1200" b="1"/>
@@ -5275,7 +5279,7 @@
             </a:r>
             <a:r>
               <a:rPr lang="zh-CN" altLang="en-US" sz="1600" b="1"/>
-              <a:t>五章）</a:t>
+              <a:t>六章）</a:t>
             </a:r>
             <a:endParaRPr lang="zh-CN" altLang="en-US" sz="1600" b="1"/>
           </a:p>
@@ -5948,7 +5952,7 @@
             </a:r>
             <a:r>
               <a:rPr lang="zh-CN" altLang="en-US" sz="1600" b="1"/>
-              <a:t>二章）</a:t>
+              <a:t>三章）</a:t>
             </a:r>
             <a:endParaRPr lang="zh-CN" altLang="en-US" sz="1600" b="1"/>
           </a:p>

--- a/figures/ppt/研究框架-精简.pptx
+++ b/figures/ppt/研究框架-精简.pptx
@@ -107,7 +107,7 @@
   <p:extLst>
     <p:ext uri="{EFAFB233-063F-42B5-8137-9DF3F51BA10A}">
       <p15:sldGuideLst xmlns:p15="http://schemas.microsoft.com/office/powerpoint/2012/main">
-        <p15:guide id="1" orient="horz" pos="2087" userDrawn="1">
+        <p15:guide id="1" orient="horz" pos="2074" userDrawn="1">
           <p15:clr>
             <a:srgbClr val="A4A3A4"/>
           </p15:clr>
@@ -2938,8 +2938,8 @@
         </p:nvSpPr>
         <p:spPr>
           <a:xfrm>
-            <a:off x="1297305" y="421005"/>
-            <a:ext cx="1802130" cy="553085"/>
+            <a:off x="5090795" y="327660"/>
+            <a:ext cx="2995295" cy="553085"/>
           </a:xfrm>
           <a:prstGeom prst="roundRect">
             <a:avLst/>
@@ -2979,217 +2979,388 @@
           <a:p>
             <a:pPr algn="ctr"/>
             <a:r>
-              <a:rPr lang="zh-CN" altLang="en-US" b="1">
+              <a:rPr lang="zh-CN" altLang="en-US" sz="1600" b="1">
+                <a:solidFill>
+                  <a:schemeClr val="tx1"/>
+                </a:solidFill>
+              </a:rPr>
+              <a:t>第一章</a:t>
+            </a:r>
+            <a:r>
+              <a:rPr lang="en-US" altLang="zh-CN" sz="1600" b="1">
+                <a:solidFill>
+                  <a:schemeClr val="tx1"/>
+                </a:solidFill>
+              </a:rPr>
+              <a:t> </a:t>
+            </a:r>
+            <a:r>
+              <a:rPr lang="zh-CN" altLang="en-US" sz="1600" b="1">
                 <a:solidFill>
                   <a:schemeClr val="tx1"/>
                 </a:solidFill>
               </a:rPr>
               <a:t>绪论</a:t>
             </a:r>
-            <a:endParaRPr lang="zh-CN" altLang="en-US" b="1">
+            <a:endParaRPr lang="zh-CN" altLang="en-US" sz="1600">
               <a:solidFill>
                 <a:schemeClr val="tx1"/>
               </a:solidFill>
             </a:endParaRPr>
           </a:p>
-          <a:p>
-            <a:pPr algn="ctr"/>
-            <a:r>
-              <a:rPr lang="zh-CN" altLang="en-US" b="1">
-                <a:solidFill>
-                  <a:schemeClr val="tx1"/>
-                </a:solidFill>
-              </a:rPr>
-              <a:t>（</a:t>
-            </a:r>
-            <a:r>
-              <a:rPr lang="zh-CN" altLang="en-US" b="1">
-                <a:solidFill>
-                  <a:schemeClr val="tx1"/>
-                </a:solidFill>
-              </a:rPr>
-              <a:t>第一章）</a:t>
-            </a:r>
-            <a:endParaRPr lang="zh-CN" altLang="en-US" b="1">
+        </p:txBody>
+      </p:sp>
+      <p:grpSp>
+        <p:nvGrpSpPr>
+          <p:cNvPr id="41" name="组合 40"/>
+          <p:cNvGrpSpPr/>
+          <p:nvPr/>
+        </p:nvGrpSpPr>
+        <p:grpSpPr>
+          <a:xfrm>
+            <a:off x="2973070" y="4147820"/>
+            <a:ext cx="2391410" cy="918845"/>
+            <a:chOff x="-5602" y="9142"/>
+            <a:chExt cx="3766" cy="1447"/>
+          </a:xfrm>
+        </p:grpSpPr>
+        <p:sp>
+          <p:nvSpPr>
+            <p:cNvPr id="49" name="圆角矩形 48"/>
+            <p:cNvSpPr/>
+            <p:nvPr/>
+          </p:nvSpPr>
+          <p:spPr>
+            <a:xfrm>
+              <a:off x="-5602" y="9142"/>
+              <a:ext cx="3741" cy="1447"/>
+            </a:xfrm>
+            <a:prstGeom prst="roundRect">
+              <a:avLst>
+                <a:gd name="adj" fmla="val 6084"/>
+              </a:avLst>
+            </a:prstGeom>
+            <a:solidFill>
+              <a:srgbClr val="9DBB61">
+                <a:alpha val="77000"/>
+              </a:srgbClr>
+            </a:solidFill>
+            <a:ln w="12700">
               <a:solidFill>
                 <a:schemeClr val="tx1"/>
               </a:solidFill>
-            </a:endParaRPr>
-          </a:p>
-        </p:txBody>
-      </p:sp>
-      <p:sp>
-        <p:nvSpPr>
-          <p:cNvPr id="5" name="圆角矩形 4"/>
+              <a:prstDash val="dash"/>
+            </a:ln>
+          </p:spPr>
+          <p:style>
+            <a:lnRef idx="2">
+              <a:schemeClr val="accent1">
+                <a:lumMod val="75000"/>
+              </a:schemeClr>
+            </a:lnRef>
+            <a:fillRef idx="1">
+              <a:schemeClr val="accent1"/>
+            </a:fillRef>
+            <a:effectRef idx="0">
+              <a:srgbClr val="FFFFFF"/>
+            </a:effectRef>
+            <a:fontRef idx="minor">
+              <a:schemeClr val="lt1"/>
+            </a:fontRef>
+          </p:style>
+          <p:txBody>
+            <a:bodyPr rtlCol="0" anchor="ctr"/>
+            <a:p>
+              <a:pPr algn="ctr"/>
+              <a:endParaRPr lang="zh-CN" altLang="en-US"/>
+            </a:p>
+          </p:txBody>
+        </p:sp>
+        <p:sp>
+          <p:nvSpPr>
+            <p:cNvPr id="50" name="文本框 49"/>
+            <p:cNvSpPr txBox="1"/>
+            <p:nvPr/>
+          </p:nvSpPr>
+          <p:spPr>
+            <a:xfrm>
+              <a:off x="-5560" y="9185"/>
+              <a:ext cx="3724" cy="1403"/>
+            </a:xfrm>
+            <a:prstGeom prst="rect">
+              <a:avLst/>
+            </a:prstGeom>
+            <a:noFill/>
+          </p:spPr>
+          <p:txBody>
+            <a:bodyPr wrap="square" rtlCol="0">
+              <a:noAutofit/>
+            </a:bodyPr>
+            <a:p>
+              <a:pPr algn="ctr"/>
+              <a:r>
+                <a:rPr lang="zh-CN" altLang="en-US" sz="1600" b="1">
+                  <a:sym typeface="+mn-ea"/>
+                </a:rPr>
+                <a:t>第四章</a:t>
+              </a:r>
+              <a:r>
+                <a:rPr lang="en-US" altLang="zh-CN" sz="1600" b="1">
+                  <a:sym typeface="+mn-ea"/>
+                </a:rPr>
+                <a:t> </a:t>
+              </a:r>
+              <a:r>
+                <a:rPr lang="zh-CN" altLang="en-US" sz="1600" b="1"/>
+                <a:t>基于局部公平性估计的分布式协作接入切换机制</a:t>
+              </a:r>
+              <a:endParaRPr lang="zh-CN" altLang="en-US" sz="1600" b="1"/>
+            </a:p>
+          </p:txBody>
+        </p:sp>
+      </p:grpSp>
+      <p:grpSp>
+        <p:nvGrpSpPr>
+          <p:cNvPr id="40" name="组合 39"/>
+          <p:cNvGrpSpPr/>
+          <p:nvPr/>
+        </p:nvGrpSpPr>
+        <p:grpSpPr>
+          <a:xfrm>
+            <a:off x="5475605" y="4151630"/>
+            <a:ext cx="2374900" cy="915670"/>
+            <a:chOff x="-1661" y="9148"/>
+            <a:chExt cx="3740" cy="1442"/>
+          </a:xfrm>
+        </p:grpSpPr>
+        <p:sp>
+          <p:nvSpPr>
+            <p:cNvPr id="60" name="圆角矩形 59"/>
+            <p:cNvSpPr/>
+            <p:nvPr/>
+          </p:nvSpPr>
+          <p:spPr>
+            <a:xfrm>
+              <a:off x="-1661" y="9148"/>
+              <a:ext cx="3741" cy="1442"/>
+            </a:xfrm>
+            <a:prstGeom prst="roundRect">
+              <a:avLst>
+                <a:gd name="adj" fmla="val 6084"/>
+              </a:avLst>
+            </a:prstGeom>
+            <a:solidFill>
+              <a:srgbClr val="31859B">
+                <a:alpha val="61000"/>
+              </a:srgbClr>
+            </a:solidFill>
+            <a:ln w="12700">
+              <a:solidFill>
+                <a:schemeClr val="tx1"/>
+              </a:solidFill>
+              <a:prstDash val="dash"/>
+            </a:ln>
+          </p:spPr>
+          <p:style>
+            <a:lnRef idx="2">
+              <a:schemeClr val="accent1">
+                <a:lumMod val="75000"/>
+              </a:schemeClr>
+            </a:lnRef>
+            <a:fillRef idx="1">
+              <a:schemeClr val="accent1"/>
+            </a:fillRef>
+            <a:effectRef idx="0">
+              <a:srgbClr val="FFFFFF"/>
+            </a:effectRef>
+            <a:fontRef idx="minor">
+              <a:schemeClr val="lt1"/>
+            </a:fontRef>
+          </p:style>
+          <p:txBody>
+            <a:bodyPr rtlCol="0" anchor="ctr"/>
+            <a:p>
+              <a:pPr algn="ctr"/>
+              <a:endParaRPr lang="zh-CN" altLang="en-US"/>
+            </a:p>
+          </p:txBody>
+        </p:sp>
+        <p:sp>
+          <p:nvSpPr>
+            <p:cNvPr id="2" name="文本框 1"/>
+            <p:cNvSpPr txBox="1"/>
+            <p:nvPr/>
+          </p:nvSpPr>
+          <p:spPr>
+            <a:xfrm>
+              <a:off x="-1661" y="9185"/>
+              <a:ext cx="3724" cy="836"/>
+            </a:xfrm>
+            <a:prstGeom prst="rect">
+              <a:avLst/>
+            </a:prstGeom>
+            <a:noFill/>
+          </p:spPr>
+          <p:txBody>
+            <a:bodyPr wrap="square" rtlCol="0">
+              <a:noAutofit/>
+            </a:bodyPr>
+            <a:p>
+              <a:pPr algn="ctr"/>
+              <a:r>
+                <a:rPr lang="zh-CN" altLang="en-US" sz="1600" b="1">
+                  <a:sym typeface="+mn-ea"/>
+                </a:rPr>
+                <a:t>第五章</a:t>
+              </a:r>
+              <a:r>
+                <a:rPr lang="en-US" altLang="zh-CN" sz="1600" b="1">
+                  <a:sym typeface="+mn-ea"/>
+                </a:rPr>
+                <a:t> </a:t>
+              </a:r>
+              <a:r>
+                <a:rPr lang="zh-CN" altLang="en-US" sz="1600" b="1"/>
+                <a:t>生成式网络态势感知的切片</a:t>
+              </a:r>
+              <a:r>
+                <a:rPr lang="en-US" altLang="zh-CN" sz="1600" b="1"/>
+                <a:t>-MAC</a:t>
+              </a:r>
+              <a:r>
+                <a:rPr lang="zh-CN" altLang="en-US" sz="1600" b="1"/>
+                <a:t>分层协作优化框架</a:t>
+              </a:r>
+              <a:endParaRPr lang="zh-CN" altLang="en-US" sz="1200" b="1"/>
+            </a:p>
+          </p:txBody>
+        </p:sp>
+      </p:grpSp>
+      <p:grpSp>
+        <p:nvGrpSpPr>
+          <p:cNvPr id="38" name="组合 37"/>
+          <p:cNvGrpSpPr/>
+          <p:nvPr/>
+        </p:nvGrpSpPr>
+        <p:grpSpPr>
+          <a:xfrm>
+            <a:off x="7978140" y="4129405"/>
+            <a:ext cx="2375535" cy="937260"/>
+            <a:chOff x="2280" y="9113"/>
+            <a:chExt cx="3741" cy="1476"/>
+          </a:xfrm>
+        </p:grpSpPr>
+        <p:sp>
+          <p:nvSpPr>
+            <p:cNvPr id="61" name="圆角矩形 60"/>
+            <p:cNvSpPr/>
+            <p:nvPr/>
+          </p:nvSpPr>
+          <p:spPr>
+            <a:xfrm>
+              <a:off x="2280" y="9113"/>
+              <a:ext cx="3741" cy="1476"/>
+            </a:xfrm>
+            <a:prstGeom prst="roundRect">
+              <a:avLst>
+                <a:gd name="adj" fmla="val 6084"/>
+              </a:avLst>
+            </a:prstGeom>
+            <a:solidFill>
+              <a:srgbClr val="EA700D">
+                <a:alpha val="61000"/>
+              </a:srgbClr>
+            </a:solidFill>
+            <a:ln w="12700">
+              <a:solidFill>
+                <a:schemeClr val="tx1"/>
+              </a:solidFill>
+              <a:prstDash val="dash"/>
+            </a:ln>
+          </p:spPr>
+          <p:style>
+            <a:lnRef idx="2">
+              <a:schemeClr val="accent1">
+                <a:lumMod val="75000"/>
+              </a:schemeClr>
+            </a:lnRef>
+            <a:fillRef idx="1">
+              <a:schemeClr val="accent1"/>
+            </a:fillRef>
+            <a:effectRef idx="0">
+              <a:srgbClr val="FFFFFF"/>
+            </a:effectRef>
+            <a:fontRef idx="minor">
+              <a:schemeClr val="lt1"/>
+            </a:fontRef>
+          </p:style>
+          <p:txBody>
+            <a:bodyPr rtlCol="0" anchor="ctr"/>
+            <a:p>
+              <a:pPr algn="ctr"/>
+              <a:endParaRPr lang="zh-CN" altLang="en-US"/>
+            </a:p>
+          </p:txBody>
+        </p:sp>
+        <p:sp>
+          <p:nvSpPr>
+            <p:cNvPr id="3" name="文本框 2"/>
+            <p:cNvSpPr txBox="1"/>
+            <p:nvPr/>
+          </p:nvSpPr>
+          <p:spPr>
+            <a:xfrm>
+              <a:off x="2297" y="9185"/>
+              <a:ext cx="3724" cy="836"/>
+            </a:xfrm>
+            <a:prstGeom prst="rect">
+              <a:avLst/>
+            </a:prstGeom>
+            <a:noFill/>
+          </p:spPr>
+          <p:txBody>
+            <a:bodyPr wrap="square" rtlCol="0">
+              <a:noAutofit/>
+            </a:bodyPr>
+            <a:p>
+              <a:pPr algn="ctr"/>
+              <a:r>
+                <a:rPr lang="zh-CN" altLang="en-US" sz="1600" b="1">
+                  <a:sym typeface="+mn-ea"/>
+                </a:rPr>
+                <a:t>第六章</a:t>
+              </a:r>
+              <a:r>
+                <a:rPr lang="en-US" altLang="zh-CN" sz="1600" b="1">
+                  <a:sym typeface="+mn-ea"/>
+                </a:rPr>
+                <a:t> </a:t>
+              </a:r>
+              <a:r>
+                <a:rPr lang="zh-CN" altLang="en-US" sz="1600" b="1"/>
+                <a:t>基于任务反馈与协同增量重传的轻量化语义传输机制</a:t>
+              </a:r>
+              <a:endParaRPr lang="zh-CN" altLang="en-US" sz="1600" b="1"/>
+            </a:p>
+          </p:txBody>
+        </p:sp>
+      </p:grpSp>
+      <p:sp>
+        <p:nvSpPr>
+          <p:cNvPr id="8" name="圆角矩形 7"/>
           <p:cNvSpPr/>
           <p:nvPr/>
         </p:nvSpPr>
         <p:spPr>
           <a:xfrm>
-            <a:off x="3230880" y="421005"/>
-            <a:ext cx="7641590" cy="553085"/>
+            <a:off x="5090795" y="1176020"/>
+            <a:ext cx="2995295" cy="553085"/>
           </a:xfrm>
           <a:prstGeom prst="roundRect">
             <a:avLst/>
           </a:prstGeom>
           <a:solidFill>
             <a:schemeClr val="accent1">
-              <a:lumMod val="40000"/>
-              <a:lumOff val="60000"/>
-            </a:schemeClr>
-          </a:solidFill>
-        </p:spPr>
-        <p:style>
-          <a:lnRef idx="2">
-            <a:schemeClr val="lt1"/>
-          </a:lnRef>
-          <a:fillRef idx="1">
-            <a:schemeClr val="accent1"/>
-          </a:fillRef>
-          <a:effectRef idx="1">
-            <a:schemeClr val="accent1"/>
-          </a:effectRef>
-          <a:fontRef idx="minor">
-            <a:schemeClr val="lt1"/>
-          </a:fontRef>
-        </p:style>
-        <p:txBody>
-          <a:bodyPr rtlCol="0" anchor="ctr"/>
-          <a:p>
-            <a:pPr algn="ctr"/>
-            <a:endParaRPr lang="zh-CN" altLang="en-US">
-              <a:solidFill>
-                <a:schemeClr val="tx1"/>
-              </a:solidFill>
-            </a:endParaRPr>
-          </a:p>
-        </p:txBody>
-      </p:sp>
-      <p:sp>
-        <p:nvSpPr>
-          <p:cNvPr id="7" name="矩形 6"/>
-          <p:cNvSpPr/>
-          <p:nvPr/>
-        </p:nvSpPr>
-        <p:spPr>
-          <a:xfrm>
-            <a:off x="3738245" y="537210"/>
-            <a:ext cx="1261745" cy="339725"/>
-          </a:xfrm>
-          <a:prstGeom prst="rect">
-            <a:avLst/>
-          </a:prstGeom>
-          <a:solidFill>
-            <a:schemeClr val="accent1">
-              <a:lumMod val="20000"/>
-              <a:lumOff val="80000"/>
-            </a:schemeClr>
-          </a:solidFill>
-        </p:spPr>
-        <p:style>
-          <a:lnRef idx="2">
-            <a:schemeClr val="accent1">
-              <a:lumMod val="75000"/>
-            </a:schemeClr>
-          </a:lnRef>
-          <a:fillRef idx="1">
-            <a:schemeClr val="accent1"/>
-          </a:fillRef>
-          <a:effectRef idx="0">
-            <a:srgbClr val="FFFFFF"/>
-          </a:effectRef>
-          <a:fontRef idx="minor">
-            <a:schemeClr val="lt1"/>
-          </a:fontRef>
-        </p:style>
-        <p:txBody>
-          <a:bodyPr rtlCol="0" anchor="ctr"/>
-          <a:p>
-            <a:pPr algn="ctr"/>
-            <a:r>
-              <a:rPr lang="zh-CN" altLang="en-US" sz="1200">
-                <a:solidFill>
-                  <a:schemeClr val="tx1"/>
-                </a:solidFill>
-              </a:rPr>
-              <a:t>研究背景</a:t>
-            </a:r>
-            <a:endParaRPr lang="zh-CN" altLang="en-US" sz="1200">
-              <a:solidFill>
-                <a:schemeClr val="tx1"/>
-              </a:solidFill>
-            </a:endParaRPr>
-          </a:p>
-        </p:txBody>
-      </p:sp>
-      <p:sp>
-        <p:nvSpPr>
-          <p:cNvPr id="11" name="圆角矩形 10"/>
-          <p:cNvSpPr/>
-          <p:nvPr/>
-        </p:nvSpPr>
-        <p:spPr>
-          <a:xfrm>
-            <a:off x="1297305" y="1044575"/>
-            <a:ext cx="1823720" cy="4434840"/>
-          </a:xfrm>
-          <a:prstGeom prst="roundRect">
-            <a:avLst/>
-          </a:prstGeom>
-          <a:solidFill>
-            <a:schemeClr val="accent4">
-              <a:lumMod val="40000"/>
-              <a:lumOff val="60000"/>
-            </a:schemeClr>
-          </a:solidFill>
-          <a:ln>
-            <a:solidFill>
-              <a:schemeClr val="bg1">
-                <a:lumMod val="50000"/>
-              </a:schemeClr>
-            </a:solidFill>
-          </a:ln>
-        </p:spPr>
-        <p:style>
-          <a:lnRef idx="2">
-            <a:schemeClr val="accent1">
-              <a:lumMod val="75000"/>
-            </a:schemeClr>
-          </a:lnRef>
-          <a:fillRef idx="1">
-            <a:schemeClr val="accent1"/>
-          </a:fillRef>
-          <a:effectRef idx="0">
-            <a:srgbClr val="FFFFFF"/>
-          </a:effectRef>
-          <a:fontRef idx="minor">
-            <a:schemeClr val="lt1"/>
-          </a:fontRef>
-        </p:style>
-        <p:txBody>
-          <a:bodyPr rtlCol="0" anchor="ctr"/>
-          <a:p>
-            <a:pPr algn="ctr"/>
-            <a:endParaRPr lang="zh-CN" altLang="en-US"/>
-          </a:p>
-        </p:txBody>
-      </p:sp>
-      <p:sp>
-        <p:nvSpPr>
-          <p:cNvPr id="12" name="圆角矩形 11"/>
-          <p:cNvSpPr/>
-          <p:nvPr/>
-        </p:nvSpPr>
-        <p:spPr>
-          <a:xfrm>
-            <a:off x="1297305" y="5624830"/>
-            <a:ext cx="1802130" cy="572135"/>
-          </a:xfrm>
-          <a:prstGeom prst="roundRect">
-            <a:avLst/>
-          </a:prstGeom>
-          <a:solidFill>
-            <a:schemeClr val="accent5">
               <a:lumMod val="40000"/>
               <a:lumOff val="60000"/>
             </a:schemeClr>
@@ -3223,20 +3394,20 @@
           <a:p>
             <a:pPr algn="ctr"/>
             <a:r>
-              <a:rPr lang="zh-CN" altLang="en-US" b="1">
+              <a:rPr lang="zh-CN" altLang="en-US" sz="1600" b="1">
                 <a:solidFill>
                   <a:schemeClr val="tx1"/>
                 </a:solidFill>
               </a:rPr>
-              <a:t>总结</a:t>
-            </a:r>
-            <a:r>
-              <a:rPr lang="zh-CN" altLang="en-US" b="1">
+              <a:t>第二章</a:t>
+            </a:r>
+            <a:r>
+              <a:rPr lang="en-US" altLang="zh-CN" b="1">
                 <a:solidFill>
                   <a:schemeClr val="tx1"/>
                 </a:solidFill>
               </a:rPr>
-              <a:t>展望</a:t>
+              <a:t> </a:t>
             </a:r>
             <a:endParaRPr lang="zh-CN" altLang="en-US" b="1">
               <a:solidFill>
@@ -3247,22 +3418,14 @@
           <a:p>
             <a:pPr algn="ctr"/>
             <a:r>
-              <a:rPr lang="zh-CN" altLang="en-US" b="1">
+              <a:rPr lang="zh-CN" altLang="en-US" sz="1600" b="1">
                 <a:solidFill>
                   <a:schemeClr val="tx1"/>
                 </a:solidFill>
               </a:rPr>
-              <a:t>（第</a:t>
-            </a:r>
-            <a:r>
-              <a:rPr lang="zh-CN" altLang="en-US" b="1">
-                <a:solidFill>
-                  <a:schemeClr val="tx1"/>
-                </a:solidFill>
-              </a:rPr>
-              <a:t>七章）</a:t>
-            </a:r>
-            <a:endParaRPr lang="zh-CN" altLang="en-US" b="1">
+              <a:t>分布式管控关键技术分析</a:t>
+            </a:r>
+            <a:endParaRPr lang="zh-CN" altLang="en-US" sz="1600" b="1">
               <a:solidFill>
                 <a:schemeClr val="tx1"/>
               </a:solidFill>
@@ -3270,63 +3433,54 @@
           </a:p>
         </p:txBody>
       </p:sp>
-      <p:sp>
-        <p:nvSpPr>
-          <p:cNvPr id="13" name="圆角矩形 12"/>
-          <p:cNvSpPr/>
+      <p:cxnSp>
+        <p:nvCxnSpPr>
+          <p:cNvPr id="9" name="直接连接符 8"/>
+          <p:cNvCxnSpPr/>
           <p:nvPr/>
-        </p:nvSpPr>
+        </p:nvCxnSpPr>
         <p:spPr>
           <a:xfrm>
-            <a:off x="3253105" y="5669280"/>
-            <a:ext cx="7641590" cy="527685"/>
+            <a:off x="2800985" y="1986280"/>
+            <a:ext cx="7635240" cy="0"/>
           </a:xfrm>
-          <a:prstGeom prst="roundRect">
+          <a:prstGeom prst="line">
             <a:avLst/>
           </a:prstGeom>
-          <a:solidFill>
-            <a:schemeClr val="accent5">
-              <a:lumMod val="40000"/>
-              <a:lumOff val="60000"/>
-            </a:schemeClr>
-          </a:solidFill>
+          <a:ln w="25400">
+            <a:solidFill>
+              <a:schemeClr val="bg1">
+                <a:lumMod val="50000"/>
+              </a:schemeClr>
+            </a:solidFill>
+            <a:prstDash val="dash"/>
+          </a:ln>
         </p:spPr>
         <p:style>
           <a:lnRef idx="2">
-            <a:schemeClr val="lt1"/>
+            <a:schemeClr val="accent1"/>
           </a:lnRef>
-          <a:fillRef idx="1">
-            <a:schemeClr val="accent1"/>
+          <a:fillRef idx="0">
+            <a:srgbClr val="FFFFFF"/>
           </a:fillRef>
-          <a:effectRef idx="1">
-            <a:schemeClr val="accent1"/>
+          <a:effectRef idx="0">
+            <a:srgbClr val="FFFFFF"/>
           </a:effectRef>
           <a:fontRef idx="minor">
-            <a:schemeClr val="lt1"/>
+            <a:schemeClr val="tx1"/>
           </a:fontRef>
         </p:style>
-        <p:txBody>
-          <a:bodyPr rtlCol="0" anchor="ctr"/>
-          <a:p>
-            <a:pPr algn="ctr"/>
-            <a:endParaRPr lang="zh-CN" altLang="en-US">
-              <a:solidFill>
-                <a:schemeClr val="tx1"/>
-              </a:solidFill>
-            </a:endParaRPr>
-          </a:p>
-        </p:txBody>
-      </p:sp>
-      <p:sp>
-        <p:nvSpPr>
-          <p:cNvPr id="14" name="文本框 13"/>
+      </p:cxnSp>
+      <p:sp>
+        <p:nvSpPr>
+          <p:cNvPr id="15" name="文本框 14"/>
           <p:cNvSpPr txBox="1"/>
           <p:nvPr/>
         </p:nvSpPr>
         <p:spPr>
           <a:xfrm>
-            <a:off x="1950720" y="2065655"/>
-            <a:ext cx="517525" cy="2461260"/>
+            <a:off x="2651125" y="1561465"/>
+            <a:ext cx="2095500" cy="337185"/>
           </a:xfrm>
           <a:prstGeom prst="rect">
             <a:avLst/>
@@ -3339,177 +3493,106 @@
           </a:bodyPr>
           <a:p>
             <a:r>
-              <a:rPr lang="zh-CN" altLang="en-US" sz="2200" b="1"/>
-              <a:t>问</a:t>
-            </a:r>
-            <a:endParaRPr lang="zh-CN" altLang="en-US" sz="2200" b="1"/>
-          </a:p>
-          <a:p>
-            <a:r>
-              <a:rPr lang="zh-CN" altLang="en-US" sz="2200" b="1"/>
-              <a:t>题</a:t>
-            </a:r>
-            <a:endParaRPr lang="zh-CN" altLang="en-US" sz="2200" b="1"/>
-          </a:p>
-          <a:p>
-            <a:r>
-              <a:rPr lang="zh-CN" altLang="en-US" sz="2200" b="1"/>
-              <a:t>与</a:t>
-            </a:r>
-            <a:endParaRPr lang="zh-CN" altLang="en-US" sz="2200" b="1"/>
-          </a:p>
-          <a:p>
-            <a:r>
-              <a:rPr lang="zh-CN" altLang="en-US" sz="2200" b="1"/>
-              <a:t>技术路线</a:t>
-            </a:r>
-            <a:endParaRPr lang="zh-CN" altLang="en-US" sz="2200" b="1"/>
-          </a:p>
-        </p:txBody>
-      </p:sp>
-      <p:sp>
-        <p:nvSpPr>
-          <p:cNvPr id="42" name="矩形 41"/>
-          <p:cNvSpPr/>
+              <a:rPr lang="zh-CN" altLang="en-US" sz="1600"/>
+              <a:t>研究背景及理论基础</a:t>
+            </a:r>
+            <a:endParaRPr lang="zh-CN" altLang="en-US" sz="1600"/>
+          </a:p>
+        </p:txBody>
+      </p:sp>
+      <p:cxnSp>
+        <p:nvCxnSpPr>
+          <p:cNvPr id="17" name="直接箭头连接符 16"/>
+          <p:cNvCxnSpPr>
+            <a:stCxn id="4" idx="2"/>
+            <a:endCxn id="8" idx="0"/>
+          </p:cNvCxnSpPr>
           <p:nvPr/>
-        </p:nvSpPr>
+        </p:nvCxnSpPr>
         <p:spPr>
           <a:xfrm>
-            <a:off x="3486150" y="5790565"/>
-            <a:ext cx="3318510" cy="351790"/>
+            <a:off x="6588760" y="880745"/>
+            <a:ext cx="0" cy="295275"/>
           </a:xfrm>
-          <a:prstGeom prst="rect">
+          <a:prstGeom prst="straightConnector1">
             <a:avLst/>
           </a:prstGeom>
-          <a:solidFill>
-            <a:schemeClr val="accent5">
-              <a:lumMod val="20000"/>
-              <a:lumOff val="80000"/>
-            </a:schemeClr>
-          </a:solidFill>
-          <a:ln>
+          <a:ln w="25400">
             <a:solidFill>
-              <a:schemeClr val="accent5">
-                <a:lumMod val="75000"/>
+              <a:schemeClr val="tx1">
+                <a:lumMod val="95000"/>
+                <a:lumOff val="5000"/>
               </a:schemeClr>
             </a:solidFill>
+            <a:tailEnd type="triangle"/>
           </a:ln>
         </p:spPr>
         <p:style>
           <a:lnRef idx="2">
-            <a:schemeClr val="accent1">
-              <a:lumMod val="75000"/>
-            </a:schemeClr>
+            <a:schemeClr val="accent1"/>
           </a:lnRef>
-          <a:fillRef idx="1">
-            <a:schemeClr val="accent1"/>
+          <a:fillRef idx="0">
+            <a:srgbClr val="FFFFFF"/>
           </a:fillRef>
           <a:effectRef idx="0">
             <a:srgbClr val="FFFFFF"/>
           </a:effectRef>
           <a:fontRef idx="minor">
-            <a:schemeClr val="lt1"/>
+            <a:schemeClr val="tx1"/>
           </a:fontRef>
         </p:style>
-        <p:txBody>
-          <a:bodyPr rtlCol="0" anchor="ctr"/>
-          <a:p>
-            <a:pPr algn="ctr"/>
-            <a:r>
-              <a:rPr lang="zh-CN" altLang="en-US" sz="1200">
-                <a:solidFill>
-                  <a:schemeClr val="tx1"/>
-                </a:solidFill>
-              </a:rPr>
-              <a:t>全文总结</a:t>
-            </a:r>
-            <a:endParaRPr lang="zh-CN" altLang="en-US" sz="1200">
-              <a:solidFill>
-                <a:schemeClr val="tx1"/>
-              </a:solidFill>
-            </a:endParaRPr>
-          </a:p>
-        </p:txBody>
-      </p:sp>
-      <p:sp>
-        <p:nvSpPr>
-          <p:cNvPr id="43" name="矩形 42"/>
-          <p:cNvSpPr/>
+      </p:cxnSp>
+      <p:cxnSp>
+        <p:nvCxnSpPr>
+          <p:cNvPr id="18" name="直接箭头连接符 17"/>
+          <p:cNvCxnSpPr/>
           <p:nvPr/>
-        </p:nvSpPr>
+        </p:nvCxnSpPr>
         <p:spPr>
           <a:xfrm>
-            <a:off x="7437755" y="5784215"/>
-            <a:ext cx="3318510" cy="358140"/>
+            <a:off x="6588760" y="1713230"/>
+            <a:ext cx="0" cy="720090"/>
           </a:xfrm>
-          <a:prstGeom prst="rect">
+          <a:prstGeom prst="straightConnector1">
             <a:avLst/>
           </a:prstGeom>
-          <a:solidFill>
-            <a:schemeClr val="accent5">
-              <a:lumMod val="20000"/>
-              <a:lumOff val="80000"/>
-            </a:schemeClr>
-          </a:solidFill>
-          <a:ln>
+          <a:ln w="31750">
             <a:solidFill>
-              <a:schemeClr val="accent5">
-                <a:lumMod val="75000"/>
+              <a:schemeClr val="accent2">
+                <a:lumMod val="50000"/>
               </a:schemeClr>
             </a:solidFill>
+            <a:tailEnd type="triangle"/>
           </a:ln>
         </p:spPr>
         <p:style>
           <a:lnRef idx="2">
-            <a:schemeClr val="accent1">
-              <a:lumMod val="75000"/>
-            </a:schemeClr>
+            <a:schemeClr val="accent1"/>
           </a:lnRef>
-          <a:fillRef idx="1">
-            <a:schemeClr val="accent1"/>
+          <a:fillRef idx="0">
+            <a:srgbClr val="FFFFFF"/>
           </a:fillRef>
           <a:effectRef idx="0">
             <a:srgbClr val="FFFFFF"/>
           </a:effectRef>
           <a:fontRef idx="minor">
-            <a:schemeClr val="lt1"/>
+            <a:schemeClr val="tx1"/>
           </a:fontRef>
         </p:style>
-        <p:txBody>
-          <a:bodyPr rtlCol="0" anchor="ctr"/>
-          <a:p>
-            <a:pPr algn="ctr"/>
-            <a:r>
-              <a:rPr lang="zh-CN" altLang="en-US" sz="1200">
-                <a:solidFill>
-                  <a:schemeClr val="tx1"/>
-                </a:solidFill>
-              </a:rPr>
-              <a:t>未来展望</a:t>
-            </a:r>
-            <a:endParaRPr lang="zh-CN" altLang="en-US" sz="1200">
-              <a:solidFill>
-                <a:schemeClr val="tx1"/>
-              </a:solidFill>
-            </a:endParaRPr>
-          </a:p>
-        </p:txBody>
-      </p:sp>
-      <p:sp>
-        <p:nvSpPr>
-          <p:cNvPr id="16" name="圆角矩形 15"/>
+      </p:cxnSp>
+      <p:sp>
+        <p:nvSpPr>
+          <p:cNvPr id="21" name="圆角矩形 20"/>
           <p:cNvSpPr/>
           <p:nvPr/>
         </p:nvSpPr>
         <p:spPr>
           <a:xfrm>
-            <a:off x="3253105" y="1031240"/>
-            <a:ext cx="7641590" cy="1299845"/>
+            <a:off x="5090795" y="2435860"/>
+            <a:ext cx="2995295" cy="553085"/>
           </a:xfrm>
           <a:prstGeom prst="roundRect">
-            <a:avLst>
-              <a:gd name="adj" fmla="val 7642"/>
-            </a:avLst>
+            <a:avLst/>
           </a:prstGeom>
           <a:solidFill>
             <a:schemeClr val="accent4">
@@ -3517,146 +3600,7 @@
               <a:lumOff val="60000"/>
             </a:schemeClr>
           </a:solidFill>
-        </p:spPr>
-        <p:style>
-          <a:lnRef idx="2">
-            <a:schemeClr val="lt1"/>
-          </a:lnRef>
-          <a:fillRef idx="1">
-            <a:schemeClr val="accent1"/>
-          </a:fillRef>
-          <a:effectRef idx="1">
-            <a:schemeClr val="accent1"/>
-          </a:effectRef>
-          <a:fontRef idx="minor">
-            <a:schemeClr val="lt1"/>
-          </a:fontRef>
-        </p:style>
-        <p:txBody>
-          <a:bodyPr rtlCol="0" anchor="ctr"/>
-          <a:p>
-            <a:pPr algn="ctr"/>
-            <a:endParaRPr lang="zh-CN" altLang="en-US">
-              <a:solidFill>
-                <a:schemeClr val="tx1"/>
-              </a:solidFill>
-            </a:endParaRPr>
-          </a:p>
-        </p:txBody>
-      </p:sp>
-      <p:grpSp>
-        <p:nvGrpSpPr>
-          <p:cNvPr id="32" name="组合 31"/>
-          <p:cNvGrpSpPr/>
-          <p:nvPr/>
-        </p:nvGrpSpPr>
-        <p:grpSpPr>
-          <a:xfrm rot="0">
-            <a:off x="3314065" y="993775"/>
-            <a:ext cx="708660" cy="245110"/>
-            <a:chOff x="7321" y="4988"/>
-            <a:chExt cx="1116" cy="386"/>
-          </a:xfrm>
-        </p:grpSpPr>
-        <p:sp>
-          <p:nvSpPr>
-            <p:cNvPr id="19" name="文本框 18"/>
-            <p:cNvSpPr txBox="1"/>
-            <p:nvPr/>
-          </p:nvSpPr>
-          <p:spPr>
-            <a:xfrm>
-              <a:off x="7485" y="4988"/>
-              <a:ext cx="952" cy="386"/>
-            </a:xfrm>
-            <a:prstGeom prst="rect">
-              <a:avLst/>
-            </a:prstGeom>
-            <a:noFill/>
-          </p:spPr>
-          <p:txBody>
-            <a:bodyPr wrap="square" rtlCol="0">
-              <a:spAutoFit/>
-            </a:bodyPr>
-            <a:p>
-              <a:r>
-                <a:rPr lang="zh-CN" altLang="en-US" sz="1000" b="1"/>
-                <a:t>目标</a:t>
-              </a:r>
-              <a:endParaRPr lang="zh-CN" altLang="en-US" sz="1000" b="1"/>
-            </a:p>
-          </p:txBody>
-        </p:sp>
-        <p:sp>
-          <p:nvSpPr>
-            <p:cNvPr id="20" name="流程图: 延期 19"/>
-            <p:cNvSpPr/>
-            <p:nvPr/>
-          </p:nvSpPr>
-          <p:spPr>
-            <a:xfrm rot="5400000">
-              <a:off x="7706" y="4684"/>
-              <a:ext cx="250" cy="1020"/>
-            </a:xfrm>
-            <a:prstGeom prst="flowChartDelay">
-              <a:avLst/>
-            </a:prstGeom>
-            <a:noFill/>
-            <a:ln>
-              <a:solidFill>
-                <a:schemeClr val="bg1">
-                  <a:lumMod val="50000"/>
-                </a:schemeClr>
-              </a:solidFill>
-              <a:prstDash val="sysDash"/>
-            </a:ln>
-          </p:spPr>
-          <p:style>
-            <a:lnRef idx="2">
-              <a:schemeClr val="accent1">
-                <a:lumMod val="75000"/>
-              </a:schemeClr>
-            </a:lnRef>
-            <a:fillRef idx="1">
-              <a:schemeClr val="accent1"/>
-            </a:fillRef>
-            <a:effectRef idx="0">
-              <a:srgbClr val="FFFFFF"/>
-            </a:effectRef>
-            <a:fontRef idx="minor">
-              <a:schemeClr val="lt1"/>
-            </a:fontRef>
-          </p:style>
-          <p:txBody>
-            <a:bodyPr rtlCol="0" anchor="ctr"/>
-            <a:p>
-              <a:pPr algn="ctr"/>
-              <a:endParaRPr lang="zh-CN" altLang="en-US"/>
-            </a:p>
-          </p:txBody>
-        </p:sp>
-      </p:grpSp>
-      <p:sp>
-        <p:nvSpPr>
-          <p:cNvPr id="22" name="矩形 21"/>
-          <p:cNvSpPr/>
-          <p:nvPr/>
-        </p:nvSpPr>
-        <p:spPr>
-          <a:xfrm>
-            <a:off x="6204585" y="1704975"/>
-            <a:ext cx="1747520" cy="447040"/>
-          </a:xfrm>
-          <a:prstGeom prst="rect">
-            <a:avLst/>
-          </a:prstGeom>
-          <a:solidFill>
-            <a:schemeClr val="accent4">
-              <a:lumMod val="20000"/>
-              <a:lumOff val="80000"/>
-            </a:schemeClr>
-          </a:solidFill>
-          <a:ln>
+          <a:ln w="19050">
             <a:solidFill>
               <a:schemeClr val="bg1">
                 <a:lumMod val="50000"/>
@@ -3685,1327 +3629,58 @@
           <a:p>
             <a:pPr algn="ctr"/>
             <a:r>
-              <a:rPr lang="zh-CN" altLang="en-US" sz="1200">
+              <a:rPr lang="zh-CN" altLang="en-US" sz="1600" b="1">
                 <a:solidFill>
                   <a:schemeClr val="tx1"/>
                 </a:solidFill>
               </a:rPr>
-              <a:t>无线资源</a:t>
-            </a:r>
-            <a:r>
-              <a:rPr lang="zh-CN" altLang="en-US" sz="1200">
+              <a:t>第三章</a:t>
+            </a:r>
+            <a:r>
+              <a:rPr lang="en-US" altLang="zh-CN" b="1">
                 <a:solidFill>
                   <a:schemeClr val="tx1"/>
                 </a:solidFill>
               </a:rPr>
-              <a:t>使用效率</a:t>
-            </a:r>
-            <a:endParaRPr lang="zh-CN" altLang="en-US" sz="1200">
+              <a:t>  </a:t>
+            </a:r>
+            <a:r>
+              <a:rPr lang="zh-CN" altLang="en-US" sz="1600" b="1">
+                <a:solidFill>
+                  <a:schemeClr val="tx1"/>
+                </a:solidFill>
+              </a:rPr>
+              <a:t>多源置信度调控的分布式网络状态感知方法</a:t>
+            </a:r>
+            <a:endParaRPr lang="zh-CN" altLang="en-US" sz="1600" b="1">
               <a:solidFill>
                 <a:schemeClr val="tx1"/>
               </a:solidFill>
             </a:endParaRPr>
           </a:p>
-          <a:p>
-            <a:pPr algn="ctr"/>
-            <a:r>
-              <a:rPr lang="zh-CN" altLang="en-US" sz="1200" b="1">
-                <a:solidFill>
-                  <a:schemeClr val="tx1"/>
-                </a:solidFill>
-              </a:rPr>
-              <a:t>用户级</a:t>
-            </a:r>
-            <a:r>
-              <a:rPr lang="en-US" altLang="zh-CN" sz="1200" b="1">
-                <a:solidFill>
-                  <a:schemeClr val="tx1"/>
-                </a:solidFill>
-              </a:rPr>
-              <a:t>QoS</a:t>
-            </a:r>
-            <a:r>
-              <a:rPr lang="zh-CN" altLang="en-US" sz="1200" b="1">
-                <a:solidFill>
-                  <a:schemeClr val="tx1"/>
-                </a:solidFill>
-              </a:rPr>
-              <a:t>满足率</a:t>
-            </a:r>
-            <a:endParaRPr lang="zh-CN" altLang="en-US" sz="1200" b="1">
-              <a:solidFill>
-                <a:schemeClr val="tx1"/>
-              </a:solidFill>
-            </a:endParaRPr>
-          </a:p>
-        </p:txBody>
-      </p:sp>
-      <p:sp>
-        <p:nvSpPr>
-          <p:cNvPr id="24" name="矩形 23"/>
-          <p:cNvSpPr/>
-          <p:nvPr/>
-        </p:nvSpPr>
-        <p:spPr>
-          <a:xfrm>
-            <a:off x="3783330" y="1704975"/>
-            <a:ext cx="1747520" cy="447040"/>
-          </a:xfrm>
-          <a:prstGeom prst="rect">
-            <a:avLst/>
-          </a:prstGeom>
-          <a:solidFill>
-            <a:schemeClr val="accent4">
-              <a:lumMod val="20000"/>
-              <a:lumOff val="80000"/>
-            </a:schemeClr>
-          </a:solidFill>
-          <a:ln>
-            <a:solidFill>
-              <a:schemeClr val="bg1">
-                <a:lumMod val="50000"/>
-              </a:schemeClr>
-            </a:solidFill>
-          </a:ln>
-        </p:spPr>
-        <p:style>
-          <a:lnRef idx="2">
-            <a:schemeClr val="accent1">
-              <a:lumMod val="75000"/>
-            </a:schemeClr>
-          </a:lnRef>
-          <a:fillRef idx="1">
-            <a:schemeClr val="accent1"/>
-          </a:fillRef>
-          <a:effectRef idx="0">
-            <a:srgbClr val="FFFFFF"/>
-          </a:effectRef>
-          <a:fontRef idx="minor">
-            <a:schemeClr val="lt1"/>
-          </a:fontRef>
-        </p:style>
-        <p:txBody>
-          <a:bodyPr rtlCol="0" anchor="ctr"/>
-          <a:p>
-            <a:pPr algn="ctr"/>
-            <a:r>
-              <a:rPr lang="zh-CN" altLang="en-US" sz="1200">
-                <a:solidFill>
-                  <a:schemeClr val="tx1"/>
-                </a:solidFill>
-              </a:rPr>
-              <a:t>接入连续性与可靠性</a:t>
-            </a:r>
-            <a:br>
-              <a:rPr lang="zh-CN" altLang="en-US" sz="1200">
-                <a:solidFill>
-                  <a:schemeClr val="tx1"/>
-                </a:solidFill>
-              </a:rPr>
-            </a:br>
-            <a:r>
-              <a:rPr lang="zh-CN" altLang="en-US" sz="1200" b="1">
-                <a:solidFill>
-                  <a:schemeClr val="tx1"/>
-                </a:solidFill>
-              </a:rPr>
-              <a:t>长期公平</a:t>
-            </a:r>
-            <a:r>
-              <a:rPr lang="zh-CN" altLang="en-US" sz="1200" b="1">
-                <a:solidFill>
-                  <a:schemeClr val="tx1"/>
-                </a:solidFill>
-              </a:rPr>
-              <a:t>接入</a:t>
-            </a:r>
-            <a:endParaRPr lang="zh-CN" altLang="en-US" sz="1200" b="1">
-              <a:solidFill>
-                <a:schemeClr val="tx1"/>
-              </a:solidFill>
-            </a:endParaRPr>
-          </a:p>
-        </p:txBody>
-      </p:sp>
-      <p:sp>
-        <p:nvSpPr>
-          <p:cNvPr id="25" name="矩形 24"/>
-          <p:cNvSpPr/>
-          <p:nvPr/>
-        </p:nvSpPr>
-        <p:spPr>
-          <a:xfrm>
-            <a:off x="8721725" y="1704975"/>
-            <a:ext cx="1747520" cy="447040"/>
-          </a:xfrm>
-          <a:prstGeom prst="rect">
-            <a:avLst/>
-          </a:prstGeom>
-          <a:solidFill>
-            <a:schemeClr val="accent4">
-              <a:lumMod val="20000"/>
-              <a:lumOff val="80000"/>
-            </a:schemeClr>
-          </a:solidFill>
-          <a:ln>
-            <a:solidFill>
-              <a:schemeClr val="bg1">
-                <a:lumMod val="50000"/>
-              </a:schemeClr>
-            </a:solidFill>
-          </a:ln>
-        </p:spPr>
-        <p:style>
-          <a:lnRef idx="2">
-            <a:schemeClr val="accent1">
-              <a:lumMod val="75000"/>
-            </a:schemeClr>
-          </a:lnRef>
-          <a:fillRef idx="1">
-            <a:schemeClr val="accent1"/>
-          </a:fillRef>
-          <a:effectRef idx="0">
-            <a:srgbClr val="FFFFFF"/>
-          </a:effectRef>
-          <a:fontRef idx="minor">
-            <a:schemeClr val="lt1"/>
-          </a:fontRef>
-        </p:style>
-        <p:txBody>
-          <a:bodyPr rtlCol="0" anchor="ctr"/>
-          <a:p>
-            <a:pPr algn="ctr"/>
-            <a:r>
-              <a:rPr lang="zh-CN" altLang="en-US" sz="1200">
-                <a:solidFill>
-                  <a:schemeClr val="tx1"/>
-                </a:solidFill>
-              </a:rPr>
-              <a:t>端到端传输可靠性</a:t>
-            </a:r>
-            <a:endParaRPr lang="zh-CN" altLang="en-US" sz="1200">
-              <a:solidFill>
-                <a:schemeClr val="tx1"/>
-              </a:solidFill>
-            </a:endParaRPr>
-          </a:p>
-          <a:p>
-            <a:pPr algn="ctr"/>
-            <a:r>
-              <a:rPr lang="zh-CN" altLang="en-US" sz="1200" b="1">
-                <a:solidFill>
-                  <a:schemeClr val="tx1"/>
-                </a:solidFill>
-              </a:rPr>
-              <a:t>任务相关语义恢复</a:t>
-            </a:r>
-            <a:r>
-              <a:rPr lang="zh-CN" altLang="en-US" sz="1200" b="1">
-                <a:solidFill>
-                  <a:schemeClr val="tx1"/>
-                </a:solidFill>
-              </a:rPr>
-              <a:t>性能</a:t>
-            </a:r>
-            <a:endParaRPr lang="zh-CN" altLang="en-US" sz="1200" b="1">
-              <a:solidFill>
-                <a:schemeClr val="tx1"/>
-              </a:solidFill>
-            </a:endParaRPr>
-          </a:p>
-        </p:txBody>
-      </p:sp>
-      <p:sp>
-        <p:nvSpPr>
-          <p:cNvPr id="26" name="圆角矩形 25"/>
-          <p:cNvSpPr/>
-          <p:nvPr/>
-        </p:nvSpPr>
-        <p:spPr>
-          <a:xfrm>
-            <a:off x="3552190" y="1639570"/>
-            <a:ext cx="4533900" cy="647065"/>
-          </a:xfrm>
-          <a:prstGeom prst="roundRect">
-            <a:avLst/>
-          </a:prstGeom>
-          <a:noFill/>
-          <a:ln w="12700">
-            <a:solidFill>
-              <a:schemeClr val="tx1"/>
-            </a:solidFill>
-            <a:prstDash val="dash"/>
-          </a:ln>
-        </p:spPr>
-        <p:style>
-          <a:lnRef idx="2">
-            <a:schemeClr val="accent1">
-              <a:lumMod val="75000"/>
-            </a:schemeClr>
-          </a:lnRef>
-          <a:fillRef idx="1">
-            <a:schemeClr val="accent1"/>
-          </a:fillRef>
-          <a:effectRef idx="0">
-            <a:srgbClr val="FFFFFF"/>
-          </a:effectRef>
-          <a:fontRef idx="minor">
-            <a:schemeClr val="lt1"/>
-          </a:fontRef>
-        </p:style>
-        <p:txBody>
-          <a:bodyPr rtlCol="0" anchor="ctr"/>
-          <a:p>
-            <a:pPr algn="ctr"/>
-            <a:endParaRPr lang="zh-CN" altLang="en-US"/>
-          </a:p>
-        </p:txBody>
-      </p:sp>
-      <p:sp>
-        <p:nvSpPr>
-          <p:cNvPr id="28" name="文本框 27"/>
-          <p:cNvSpPr txBox="1"/>
-          <p:nvPr/>
-        </p:nvSpPr>
-        <p:spPr>
-          <a:xfrm>
-            <a:off x="5530850" y="2022475"/>
-            <a:ext cx="947420" cy="306705"/>
-          </a:xfrm>
-          <a:prstGeom prst="rect">
-            <a:avLst/>
-          </a:prstGeom>
-          <a:noFill/>
-        </p:spPr>
-        <p:txBody>
-          <a:bodyPr wrap="square" rtlCol="0">
-            <a:spAutoFit/>
-          </a:bodyPr>
-          <a:p>
-            <a:r>
-              <a:rPr lang="zh-CN" altLang="en-US" sz="1400"/>
-              <a:t>接入层</a:t>
-            </a:r>
-            <a:endParaRPr lang="zh-CN" altLang="en-US" sz="1400"/>
-          </a:p>
-        </p:txBody>
-      </p:sp>
-      <p:sp>
-        <p:nvSpPr>
-          <p:cNvPr id="29" name="圆角矩形 28"/>
-          <p:cNvSpPr/>
-          <p:nvPr/>
-        </p:nvSpPr>
-        <p:spPr>
-          <a:xfrm>
-            <a:off x="3253105" y="2450465"/>
-            <a:ext cx="7641590" cy="773430"/>
-          </a:xfrm>
-          <a:prstGeom prst="roundRect">
-            <a:avLst>
-              <a:gd name="adj" fmla="val 7642"/>
-            </a:avLst>
-          </a:prstGeom>
-          <a:solidFill>
-            <a:schemeClr val="accent4">
-              <a:lumMod val="40000"/>
-              <a:lumOff val="60000"/>
-            </a:schemeClr>
-          </a:solidFill>
-        </p:spPr>
-        <p:style>
-          <a:lnRef idx="2">
-            <a:schemeClr val="lt1"/>
-          </a:lnRef>
-          <a:fillRef idx="1">
-            <a:schemeClr val="accent1"/>
-          </a:fillRef>
-          <a:effectRef idx="1">
-            <a:schemeClr val="accent1"/>
-          </a:effectRef>
-          <a:fontRef idx="minor">
-            <a:schemeClr val="lt1"/>
-          </a:fontRef>
-        </p:style>
-        <p:txBody>
-          <a:bodyPr rtlCol="0" anchor="ctr"/>
-          <a:p>
-            <a:pPr algn="ctr"/>
-            <a:endParaRPr lang="zh-CN" altLang="en-US">
-              <a:solidFill>
-                <a:schemeClr val="tx1"/>
-              </a:solidFill>
-            </a:endParaRPr>
-          </a:p>
-        </p:txBody>
-      </p:sp>
-      <p:sp>
-        <p:nvSpPr>
-          <p:cNvPr id="30" name="文本框 29"/>
-          <p:cNvSpPr txBox="1"/>
-          <p:nvPr/>
-        </p:nvSpPr>
-        <p:spPr>
-          <a:xfrm>
-            <a:off x="3375025" y="2433320"/>
-            <a:ext cx="604520" cy="245110"/>
-          </a:xfrm>
-          <a:prstGeom prst="rect">
-            <a:avLst/>
-          </a:prstGeom>
-          <a:noFill/>
-        </p:spPr>
-        <p:txBody>
-          <a:bodyPr wrap="square" rtlCol="0">
-            <a:spAutoFit/>
-          </a:bodyPr>
-          <a:p>
-            <a:r>
-              <a:rPr lang="en-US" altLang="zh-CN" sz="1000"/>
-              <a:t>  </a:t>
-            </a:r>
-            <a:r>
-              <a:rPr lang="zh-CN" altLang="en-US" sz="1000" b="1"/>
-              <a:t>挑战</a:t>
-            </a:r>
-            <a:endParaRPr lang="zh-CN" altLang="en-US" sz="1000" b="1"/>
-          </a:p>
-        </p:txBody>
-      </p:sp>
-      <p:sp>
-        <p:nvSpPr>
-          <p:cNvPr id="31" name="流程图: 延期 30"/>
-          <p:cNvSpPr/>
-          <p:nvPr/>
-        </p:nvSpPr>
-        <p:spPr>
-          <a:xfrm rot="5400000">
-            <a:off x="3594100" y="2230755"/>
-            <a:ext cx="158750" cy="647700"/>
-          </a:xfrm>
-          <a:prstGeom prst="flowChartDelay">
-            <a:avLst/>
-          </a:prstGeom>
-          <a:noFill/>
-          <a:ln>
-            <a:solidFill>
-              <a:schemeClr val="bg1">
-                <a:lumMod val="50000"/>
-              </a:schemeClr>
-            </a:solidFill>
-            <a:prstDash val="sysDash"/>
-          </a:ln>
-        </p:spPr>
-        <p:style>
-          <a:lnRef idx="2">
-            <a:schemeClr val="accent1">
-              <a:lumMod val="75000"/>
-            </a:schemeClr>
-          </a:lnRef>
-          <a:fillRef idx="1">
-            <a:schemeClr val="accent1"/>
-          </a:fillRef>
-          <a:effectRef idx="0">
-            <a:srgbClr val="FFFFFF"/>
-          </a:effectRef>
-          <a:fontRef idx="minor">
-            <a:schemeClr val="lt1"/>
-          </a:fontRef>
-        </p:style>
-        <p:txBody>
-          <a:bodyPr rtlCol="0" anchor="ctr"/>
-          <a:p>
-            <a:pPr algn="ctr"/>
-            <a:endParaRPr lang="zh-CN" altLang="en-US"/>
-          </a:p>
-        </p:txBody>
-      </p:sp>
-      <p:sp>
-        <p:nvSpPr>
-          <p:cNvPr id="33" name="矩形 32"/>
-          <p:cNvSpPr/>
-          <p:nvPr/>
-        </p:nvSpPr>
-        <p:spPr>
-          <a:xfrm>
-            <a:off x="3668395" y="2708910"/>
-            <a:ext cx="2160905" cy="447040"/>
-          </a:xfrm>
-          <a:prstGeom prst="rect">
-            <a:avLst/>
-          </a:prstGeom>
-          <a:solidFill>
-            <a:schemeClr val="accent4">
-              <a:lumMod val="20000"/>
-              <a:lumOff val="80000"/>
-            </a:schemeClr>
-          </a:solidFill>
-          <a:ln>
-            <a:solidFill>
-              <a:schemeClr val="bg1">
-                <a:lumMod val="50000"/>
-              </a:schemeClr>
-            </a:solidFill>
-          </a:ln>
-        </p:spPr>
-        <p:style>
-          <a:lnRef idx="2">
-            <a:schemeClr val="accent1">
-              <a:lumMod val="75000"/>
-            </a:schemeClr>
-          </a:lnRef>
-          <a:fillRef idx="1">
-            <a:schemeClr val="accent1"/>
-          </a:fillRef>
-          <a:effectRef idx="0">
-            <a:srgbClr val="FFFFFF"/>
-          </a:effectRef>
-          <a:fontRef idx="minor">
-            <a:schemeClr val="lt1"/>
-          </a:fontRef>
-        </p:style>
-        <p:txBody>
-          <a:bodyPr rtlCol="0" anchor="ctr"/>
-          <a:p>
-            <a:pPr algn="ctr"/>
-            <a:r>
-              <a:rPr lang="zh-CN" altLang="en-US" sz="1200">
-                <a:solidFill>
-                  <a:schemeClr val="tx1"/>
-                </a:solidFill>
-              </a:rPr>
-              <a:t>全局信息缺失</a:t>
-            </a:r>
-            <a:r>
-              <a:rPr lang="zh-CN" altLang="en-US" sz="1200">
-                <a:solidFill>
-                  <a:schemeClr val="tx1"/>
-                </a:solidFill>
-              </a:rPr>
-              <a:t>下</a:t>
-            </a:r>
-            <a:endParaRPr lang="zh-CN" altLang="en-US" sz="1200">
-              <a:solidFill>
-                <a:schemeClr val="tx1"/>
-              </a:solidFill>
-            </a:endParaRPr>
-          </a:p>
-          <a:p>
-            <a:pPr algn="ctr"/>
-            <a:r>
-              <a:rPr lang="zh-CN" altLang="en-US" sz="1200" b="1">
-                <a:solidFill>
-                  <a:srgbClr val="C00000"/>
-                </a:solidFill>
-              </a:rPr>
-              <a:t>系统公平性</a:t>
-            </a:r>
-            <a:r>
-              <a:rPr lang="zh-CN" altLang="en-US" sz="1200">
-                <a:solidFill>
-                  <a:schemeClr val="tx1"/>
-                </a:solidFill>
-              </a:rPr>
-              <a:t>受损</a:t>
-            </a:r>
-            <a:endParaRPr lang="zh-CN" altLang="en-US" sz="1200">
-              <a:solidFill>
-                <a:schemeClr val="tx1"/>
-              </a:solidFill>
-            </a:endParaRPr>
-          </a:p>
-        </p:txBody>
-      </p:sp>
-      <p:sp>
-        <p:nvSpPr>
-          <p:cNvPr id="34" name="圆角矩形 33"/>
-          <p:cNvSpPr/>
-          <p:nvPr/>
-        </p:nvSpPr>
-        <p:spPr>
-          <a:xfrm>
-            <a:off x="8171815" y="1631950"/>
-            <a:ext cx="2489200" cy="647065"/>
-          </a:xfrm>
-          <a:prstGeom prst="roundRect">
-            <a:avLst/>
-          </a:prstGeom>
-          <a:noFill/>
-          <a:ln w="12700">
-            <a:solidFill>
-              <a:schemeClr val="tx1"/>
-            </a:solidFill>
-            <a:prstDash val="dash"/>
-          </a:ln>
-        </p:spPr>
-        <p:style>
-          <a:lnRef idx="2">
-            <a:schemeClr val="accent1">
-              <a:lumMod val="75000"/>
-            </a:schemeClr>
-          </a:lnRef>
-          <a:fillRef idx="1">
-            <a:schemeClr val="accent1"/>
-          </a:fillRef>
-          <a:effectRef idx="0">
-            <a:srgbClr val="FFFFFF"/>
-          </a:effectRef>
-          <a:fontRef idx="minor">
-            <a:schemeClr val="lt1"/>
-          </a:fontRef>
-        </p:style>
-        <p:txBody>
-          <a:bodyPr rtlCol="0" anchor="ctr"/>
-          <a:p>
-            <a:pPr algn="ctr"/>
-            <a:endParaRPr lang="zh-CN" altLang="en-US"/>
-          </a:p>
-        </p:txBody>
-      </p:sp>
-      <p:sp>
-        <p:nvSpPr>
-          <p:cNvPr id="35" name="文本框 34"/>
-          <p:cNvSpPr txBox="1"/>
-          <p:nvPr/>
-        </p:nvSpPr>
-        <p:spPr>
-          <a:xfrm>
-            <a:off x="8096885" y="1694180"/>
-            <a:ext cx="757555" cy="521970"/>
-          </a:xfrm>
-          <a:prstGeom prst="rect">
-            <a:avLst/>
-          </a:prstGeom>
-          <a:noFill/>
-        </p:spPr>
-        <p:txBody>
-          <a:bodyPr wrap="square" rtlCol="0">
-            <a:spAutoFit/>
-          </a:bodyPr>
-          <a:p>
-            <a:r>
-              <a:rPr lang="zh-CN" altLang="en-US" sz="1400"/>
-              <a:t>网络</a:t>
-            </a:r>
-            <a:r>
-              <a:rPr lang="en-US" altLang="zh-CN" sz="1400"/>
-              <a:t>/</a:t>
-            </a:r>
-            <a:endParaRPr lang="en-US" altLang="zh-CN" sz="1400"/>
-          </a:p>
-          <a:p>
-            <a:r>
-              <a:rPr lang="zh-CN" altLang="en-US" sz="1400"/>
-              <a:t>应用层</a:t>
-            </a:r>
-            <a:endParaRPr lang="zh-CN" altLang="en-US" sz="1400"/>
-          </a:p>
-        </p:txBody>
-      </p:sp>
-      <p:sp>
-        <p:nvSpPr>
-          <p:cNvPr id="36" name="矩形 35"/>
-          <p:cNvSpPr/>
-          <p:nvPr/>
-        </p:nvSpPr>
-        <p:spPr>
-          <a:xfrm>
-            <a:off x="6050915" y="2708910"/>
-            <a:ext cx="2258060" cy="447040"/>
-          </a:xfrm>
-          <a:prstGeom prst="rect">
-            <a:avLst/>
-          </a:prstGeom>
-          <a:solidFill>
-            <a:schemeClr val="accent4">
-              <a:lumMod val="20000"/>
-              <a:lumOff val="80000"/>
-            </a:schemeClr>
-          </a:solidFill>
-          <a:ln>
-            <a:solidFill>
-              <a:schemeClr val="bg1">
-                <a:lumMod val="50000"/>
-              </a:schemeClr>
-            </a:solidFill>
-          </a:ln>
-        </p:spPr>
-        <p:style>
-          <a:lnRef idx="2">
-            <a:schemeClr val="accent1">
-              <a:lumMod val="75000"/>
-            </a:schemeClr>
-          </a:lnRef>
-          <a:fillRef idx="1">
-            <a:schemeClr val="accent1"/>
-          </a:fillRef>
-          <a:effectRef idx="0">
-            <a:srgbClr val="FFFFFF"/>
-          </a:effectRef>
-          <a:fontRef idx="minor">
-            <a:schemeClr val="lt1"/>
-          </a:fontRef>
-        </p:style>
-        <p:txBody>
-          <a:bodyPr rtlCol="0" anchor="ctr"/>
-          <a:p>
-            <a:pPr algn="ctr"/>
-            <a:r>
-              <a:rPr lang="zh-CN" altLang="en-US" sz="1200">
-                <a:solidFill>
-                  <a:schemeClr val="tx1"/>
-                </a:solidFill>
-              </a:rPr>
-              <a:t>网络随机波动</a:t>
-            </a:r>
-            <a:r>
-              <a:rPr lang="zh-CN" altLang="en-US" sz="1200">
-                <a:solidFill>
-                  <a:schemeClr val="tx1"/>
-                </a:solidFill>
-              </a:rPr>
-              <a:t>使得</a:t>
-            </a:r>
-            <a:endParaRPr lang="zh-CN" altLang="en-US" sz="1200">
-              <a:solidFill>
-                <a:schemeClr val="tx1"/>
-              </a:solidFill>
-            </a:endParaRPr>
-          </a:p>
-          <a:p>
-            <a:pPr algn="ctr"/>
-            <a:r>
-              <a:rPr lang="en-US" altLang="zh-CN" sz="1200" b="1">
-                <a:solidFill>
-                  <a:srgbClr val="C00000"/>
-                </a:solidFill>
-              </a:rPr>
-              <a:t>QoS</a:t>
-            </a:r>
-            <a:r>
-              <a:rPr lang="zh-CN" altLang="en-US" sz="1200">
-                <a:solidFill>
-                  <a:schemeClr val="tx1"/>
-                </a:solidFill>
-              </a:rPr>
-              <a:t>无法长期</a:t>
-            </a:r>
-            <a:r>
-              <a:rPr lang="zh-CN" altLang="en-US" sz="1200">
-                <a:solidFill>
-                  <a:schemeClr val="tx1"/>
-                </a:solidFill>
-              </a:rPr>
-              <a:t>保证</a:t>
-            </a:r>
-            <a:endParaRPr lang="zh-CN" altLang="en-US" sz="1200">
-              <a:solidFill>
-                <a:schemeClr val="tx1"/>
-              </a:solidFill>
-            </a:endParaRPr>
-          </a:p>
-        </p:txBody>
-      </p:sp>
-      <p:sp>
-        <p:nvSpPr>
-          <p:cNvPr id="37" name="矩形 36"/>
-          <p:cNvSpPr/>
-          <p:nvPr/>
-        </p:nvSpPr>
-        <p:spPr>
-          <a:xfrm>
-            <a:off x="8433435" y="2708910"/>
-            <a:ext cx="2207895" cy="447040"/>
-          </a:xfrm>
-          <a:prstGeom prst="rect">
-            <a:avLst/>
-          </a:prstGeom>
-          <a:solidFill>
-            <a:schemeClr val="accent4">
-              <a:lumMod val="20000"/>
-              <a:lumOff val="80000"/>
-            </a:schemeClr>
-          </a:solidFill>
-          <a:ln>
-            <a:solidFill>
-              <a:schemeClr val="bg1">
-                <a:lumMod val="50000"/>
-              </a:schemeClr>
-            </a:solidFill>
-          </a:ln>
-        </p:spPr>
-        <p:style>
-          <a:lnRef idx="2">
-            <a:schemeClr val="accent1">
-              <a:lumMod val="75000"/>
-            </a:schemeClr>
-          </a:lnRef>
-          <a:fillRef idx="1">
-            <a:schemeClr val="accent1"/>
-          </a:fillRef>
-          <a:effectRef idx="0">
-            <a:srgbClr val="FFFFFF"/>
-          </a:effectRef>
-          <a:fontRef idx="minor">
-            <a:schemeClr val="lt1"/>
-          </a:fontRef>
-        </p:style>
-        <p:txBody>
-          <a:bodyPr rtlCol="0" anchor="ctr"/>
-          <a:p>
-            <a:pPr algn="ctr"/>
-            <a:endParaRPr lang="en-US" altLang="zh-CN" sz="1200">
-              <a:solidFill>
-                <a:schemeClr val="tx1"/>
-              </a:solidFill>
-            </a:endParaRPr>
-          </a:p>
-          <a:p>
-            <a:pPr algn="ctr"/>
-            <a:r>
-              <a:rPr lang="en-US" altLang="zh-CN" sz="1200">
-                <a:solidFill>
-                  <a:schemeClr val="tx1"/>
-                </a:solidFill>
-              </a:rPr>
-              <a:t>LEO</a:t>
-            </a:r>
-            <a:r>
-              <a:rPr lang="zh-CN" altLang="en-US" sz="1200">
-                <a:solidFill>
-                  <a:schemeClr val="tx1"/>
-                </a:solidFill>
-              </a:rPr>
-              <a:t>卫星计算资源受限</a:t>
-            </a:r>
-            <a:r>
-              <a:rPr lang="zh-CN" altLang="en-US" sz="1200">
-                <a:solidFill>
-                  <a:schemeClr val="tx1"/>
-                </a:solidFill>
-              </a:rPr>
-              <a:t>下</a:t>
-            </a:r>
-            <a:endParaRPr lang="zh-CN" altLang="en-US" sz="1200">
-              <a:solidFill>
-                <a:schemeClr val="tx1"/>
-              </a:solidFill>
-            </a:endParaRPr>
-          </a:p>
-          <a:p>
-            <a:pPr algn="ctr"/>
-            <a:r>
-              <a:rPr lang="zh-CN" altLang="en-US" sz="1200">
-                <a:solidFill>
-                  <a:schemeClr val="tx1"/>
-                </a:solidFill>
-              </a:rPr>
-              <a:t>语义模型</a:t>
-            </a:r>
-            <a:r>
-              <a:rPr lang="zh-CN" altLang="en-US" sz="1200" b="1">
-                <a:solidFill>
-                  <a:srgbClr val="C00000"/>
-                </a:solidFill>
-              </a:rPr>
-              <a:t>单次</a:t>
-            </a:r>
-            <a:r>
-              <a:rPr lang="zh-CN" altLang="en-US" sz="1200">
-                <a:solidFill>
-                  <a:schemeClr val="tx1"/>
-                </a:solidFill>
-              </a:rPr>
-              <a:t>传输能力不足</a:t>
-            </a:r>
-            <a:endParaRPr lang="zh-CN" altLang="en-US" sz="1200">
-              <a:solidFill>
-                <a:schemeClr val="tx1"/>
-              </a:solidFill>
-            </a:endParaRPr>
-          </a:p>
-          <a:p>
-            <a:pPr algn="ctr"/>
-            <a:endParaRPr lang="zh-CN" altLang="en-US" sz="1200">
-              <a:solidFill>
-                <a:schemeClr val="tx1"/>
-              </a:solidFill>
-            </a:endParaRPr>
-          </a:p>
         </p:txBody>
       </p:sp>
       <p:cxnSp>
         <p:nvCxnSpPr>
-          <p:cNvPr id="44" name="直接箭头连接符 43"/>
+          <p:cNvPr id="54" name="直接箭头连接符 53"/>
           <p:cNvCxnSpPr/>
           <p:nvPr/>
         </p:nvCxnSpPr>
         <p:spPr>
-          <a:xfrm>
-            <a:off x="4755515" y="2154555"/>
-            <a:ext cx="0" cy="537845"/>
+          <a:xfrm flipH="1">
+            <a:off x="6564630" y="2828290"/>
+            <a:ext cx="0" cy="1321435"/>
           </a:xfrm>
           <a:prstGeom prst="straightConnector1">
             <a:avLst/>
           </a:prstGeom>
-          <a:ln w="19050">
+          <a:ln w="31750">
             <a:solidFill>
-              <a:schemeClr val="tx2">
-                <a:lumMod val="60000"/>
-                <a:lumOff val="40000"/>
-              </a:schemeClr>
-            </a:solidFill>
-            <a:tailEnd type="arrow"/>
-          </a:ln>
-        </p:spPr>
-        <p:style>
-          <a:lnRef idx="2">
-            <a:schemeClr val="accent1"/>
-          </a:lnRef>
-          <a:fillRef idx="0">
-            <a:srgbClr val="FFFFFF"/>
-          </a:fillRef>
-          <a:effectRef idx="0">
-            <a:srgbClr val="FFFFFF"/>
-          </a:effectRef>
-          <a:fontRef idx="minor">
-            <a:schemeClr val="tx1"/>
-          </a:fontRef>
-        </p:style>
-      </p:cxnSp>
-      <p:sp>
-        <p:nvSpPr>
-          <p:cNvPr id="45" name="圆角矩形 44"/>
-          <p:cNvSpPr/>
-          <p:nvPr/>
-        </p:nvSpPr>
-        <p:spPr>
-          <a:xfrm>
-            <a:off x="3253105" y="4225290"/>
-            <a:ext cx="7641590" cy="1254125"/>
-          </a:xfrm>
-          <a:prstGeom prst="roundRect">
-            <a:avLst>
-              <a:gd name="adj" fmla="val 7642"/>
-            </a:avLst>
-          </a:prstGeom>
-          <a:solidFill>
-            <a:schemeClr val="accent4">
-              <a:lumMod val="40000"/>
-              <a:lumOff val="60000"/>
-            </a:schemeClr>
-          </a:solidFill>
-        </p:spPr>
-        <p:style>
-          <a:lnRef idx="2">
-            <a:schemeClr val="lt1"/>
-          </a:lnRef>
-          <a:fillRef idx="1">
-            <a:schemeClr val="accent1"/>
-          </a:fillRef>
-          <a:effectRef idx="1">
-            <a:schemeClr val="accent1"/>
-          </a:effectRef>
-          <a:fontRef idx="minor">
-            <a:schemeClr val="lt1"/>
-          </a:fontRef>
-        </p:style>
-        <p:txBody>
-          <a:bodyPr rtlCol="0" anchor="ctr"/>
-          <a:p>
-            <a:pPr algn="ctr"/>
-            <a:endParaRPr lang="zh-CN" altLang="en-US">
-              <a:solidFill>
-                <a:schemeClr val="tx1"/>
-              </a:solidFill>
-            </a:endParaRPr>
-          </a:p>
-        </p:txBody>
-      </p:sp>
-      <p:sp>
-        <p:nvSpPr>
-          <p:cNvPr id="46" name="流程图: 延期 45"/>
-          <p:cNvSpPr/>
-          <p:nvPr/>
-        </p:nvSpPr>
-        <p:spPr>
-          <a:xfrm rot="5400000">
-            <a:off x="3594100" y="4018915"/>
-            <a:ext cx="158750" cy="647700"/>
-          </a:xfrm>
-          <a:prstGeom prst="flowChartDelay">
-            <a:avLst/>
-          </a:prstGeom>
-          <a:noFill/>
-          <a:ln>
-            <a:solidFill>
-              <a:schemeClr val="bg1">
+              <a:schemeClr val="accent2">
                 <a:lumMod val="50000"/>
               </a:schemeClr>
             </a:solidFill>
-            <a:prstDash val="sysDash"/>
-          </a:ln>
-        </p:spPr>
-        <p:style>
-          <a:lnRef idx="2">
-            <a:schemeClr val="accent1">
-              <a:lumMod val="75000"/>
-            </a:schemeClr>
-          </a:lnRef>
-          <a:fillRef idx="1">
-            <a:schemeClr val="accent1"/>
-          </a:fillRef>
-          <a:effectRef idx="0">
-            <a:srgbClr val="FFFFFF"/>
-          </a:effectRef>
-          <a:fontRef idx="minor">
-            <a:schemeClr val="lt1"/>
-          </a:fontRef>
-        </p:style>
-        <p:txBody>
-          <a:bodyPr rtlCol="0" anchor="ctr"/>
-          <a:p>
-            <a:pPr algn="ctr"/>
-            <a:endParaRPr lang="zh-CN" altLang="en-US"/>
-          </a:p>
-        </p:txBody>
-      </p:sp>
-      <p:sp>
-        <p:nvSpPr>
-          <p:cNvPr id="48" name="文本框 47"/>
-          <p:cNvSpPr txBox="1"/>
-          <p:nvPr/>
-        </p:nvSpPr>
-        <p:spPr>
-          <a:xfrm>
-            <a:off x="3343275" y="4207510"/>
-            <a:ext cx="694055" cy="245110"/>
-          </a:xfrm>
-          <a:prstGeom prst="rect">
-            <a:avLst/>
-          </a:prstGeom>
-          <a:noFill/>
-        </p:spPr>
-        <p:txBody>
-          <a:bodyPr wrap="square" rtlCol="0">
-            <a:spAutoFit/>
-          </a:bodyPr>
-          <a:p>
-            <a:r>
-              <a:rPr lang="zh-CN" altLang="en-US" sz="1000" b="1"/>
-              <a:t>技术</a:t>
-            </a:r>
-            <a:r>
-              <a:rPr lang="zh-CN" altLang="en-US" sz="1000" b="1"/>
-              <a:t>方案</a:t>
-            </a:r>
-            <a:endParaRPr lang="zh-CN" altLang="en-US" sz="1000" b="1"/>
-          </a:p>
-        </p:txBody>
-      </p:sp>
-      <p:sp>
-        <p:nvSpPr>
-          <p:cNvPr id="49" name="圆角矩形 48"/>
-          <p:cNvSpPr/>
-          <p:nvPr/>
-        </p:nvSpPr>
-        <p:spPr>
-          <a:xfrm>
-            <a:off x="3375660" y="4467225"/>
-            <a:ext cx="2375535" cy="918845"/>
-          </a:xfrm>
-          <a:prstGeom prst="roundRect">
-            <a:avLst>
-              <a:gd name="adj" fmla="val 6084"/>
-            </a:avLst>
-          </a:prstGeom>
-          <a:solidFill>
-            <a:srgbClr val="9DBB61">
-              <a:alpha val="77000"/>
-            </a:srgbClr>
-          </a:solidFill>
-          <a:ln w="12700">
-            <a:solidFill>
-              <a:schemeClr val="tx1"/>
-            </a:solidFill>
-            <a:prstDash val="dash"/>
-          </a:ln>
-        </p:spPr>
-        <p:style>
-          <a:lnRef idx="2">
-            <a:schemeClr val="accent1">
-              <a:lumMod val="75000"/>
-            </a:schemeClr>
-          </a:lnRef>
-          <a:fillRef idx="1">
-            <a:schemeClr val="accent1"/>
-          </a:fillRef>
-          <a:effectRef idx="0">
-            <a:srgbClr val="FFFFFF"/>
-          </a:effectRef>
-          <a:fontRef idx="minor">
-            <a:schemeClr val="lt1"/>
-          </a:fontRef>
-        </p:style>
-        <p:txBody>
-          <a:bodyPr rtlCol="0" anchor="ctr"/>
-          <a:p>
-            <a:pPr algn="ctr"/>
-            <a:endParaRPr lang="zh-CN" altLang="en-US"/>
-          </a:p>
-        </p:txBody>
-      </p:sp>
-      <p:sp>
-        <p:nvSpPr>
-          <p:cNvPr id="50" name="文本框 49"/>
-          <p:cNvSpPr txBox="1"/>
-          <p:nvPr/>
-        </p:nvSpPr>
-        <p:spPr>
-          <a:xfrm>
-            <a:off x="3402330" y="4494530"/>
-            <a:ext cx="2364740" cy="530860"/>
-          </a:xfrm>
-          <a:prstGeom prst="rect">
-            <a:avLst/>
-          </a:prstGeom>
-          <a:noFill/>
-        </p:spPr>
-        <p:txBody>
-          <a:bodyPr wrap="square" rtlCol="0">
-            <a:noAutofit/>
-          </a:bodyPr>
-          <a:p>
-            <a:pPr algn="ctr"/>
-            <a:r>
-              <a:rPr lang="zh-CN" altLang="en-US" sz="1600" b="1"/>
-              <a:t>基于局部公平性估计的分布式协作接入切换机制（第</a:t>
-            </a:r>
-            <a:r>
-              <a:rPr lang="zh-CN" altLang="en-US" sz="1600" b="1"/>
-              <a:t>四章）</a:t>
-            </a:r>
-            <a:endParaRPr lang="zh-CN" altLang="en-US" sz="1600" b="1"/>
-          </a:p>
-        </p:txBody>
-      </p:sp>
-      <p:sp>
-        <p:nvSpPr>
-          <p:cNvPr id="51" name="矩形 50"/>
-          <p:cNvSpPr/>
-          <p:nvPr/>
-        </p:nvSpPr>
-        <p:spPr>
-          <a:xfrm>
-            <a:off x="5473065" y="518160"/>
-            <a:ext cx="1261745" cy="339725"/>
-          </a:xfrm>
-          <a:prstGeom prst="rect">
-            <a:avLst/>
-          </a:prstGeom>
-          <a:solidFill>
-            <a:schemeClr val="accent1">
-              <a:lumMod val="20000"/>
-              <a:lumOff val="80000"/>
-            </a:schemeClr>
-          </a:solidFill>
-        </p:spPr>
-        <p:style>
-          <a:lnRef idx="2">
-            <a:schemeClr val="accent1">
-              <a:lumMod val="75000"/>
-            </a:schemeClr>
-          </a:lnRef>
-          <a:fillRef idx="1">
-            <a:schemeClr val="accent1"/>
-          </a:fillRef>
-          <a:effectRef idx="0">
-            <a:srgbClr val="FFFFFF"/>
-          </a:effectRef>
-          <a:fontRef idx="minor">
-            <a:schemeClr val="lt1"/>
-          </a:fontRef>
-        </p:style>
-        <p:txBody>
-          <a:bodyPr rtlCol="0" anchor="ctr"/>
-          <a:p>
-            <a:pPr algn="ctr"/>
-            <a:r>
-              <a:rPr lang="zh-CN" altLang="en-US" sz="1200">
-                <a:solidFill>
-                  <a:schemeClr val="tx1"/>
-                </a:solidFill>
-              </a:rPr>
-              <a:t>研究</a:t>
-            </a:r>
-            <a:r>
-              <a:rPr lang="zh-CN" altLang="en-US" sz="1200">
-                <a:solidFill>
-                  <a:schemeClr val="tx1"/>
-                </a:solidFill>
-              </a:rPr>
-              <a:t>现状</a:t>
-            </a:r>
-            <a:endParaRPr lang="zh-CN" altLang="en-US" sz="1200">
-              <a:solidFill>
-                <a:schemeClr val="tx1"/>
-              </a:solidFill>
-            </a:endParaRPr>
-          </a:p>
-        </p:txBody>
-      </p:sp>
-      <p:sp>
-        <p:nvSpPr>
-          <p:cNvPr id="52" name="矩形 51"/>
-          <p:cNvSpPr/>
-          <p:nvPr/>
-        </p:nvSpPr>
-        <p:spPr>
-          <a:xfrm>
-            <a:off x="7207885" y="518160"/>
-            <a:ext cx="1261745" cy="339725"/>
-          </a:xfrm>
-          <a:prstGeom prst="rect">
-            <a:avLst/>
-          </a:prstGeom>
-          <a:solidFill>
-            <a:schemeClr val="accent1">
-              <a:lumMod val="20000"/>
-              <a:lumOff val="80000"/>
-            </a:schemeClr>
-          </a:solidFill>
-        </p:spPr>
-        <p:style>
-          <a:lnRef idx="2">
-            <a:schemeClr val="accent1">
-              <a:lumMod val="75000"/>
-            </a:schemeClr>
-          </a:lnRef>
-          <a:fillRef idx="1">
-            <a:schemeClr val="accent1"/>
-          </a:fillRef>
-          <a:effectRef idx="0">
-            <a:srgbClr val="FFFFFF"/>
-          </a:effectRef>
-          <a:fontRef idx="minor">
-            <a:schemeClr val="lt1"/>
-          </a:fontRef>
-        </p:style>
-        <p:txBody>
-          <a:bodyPr rtlCol="0" anchor="ctr"/>
-          <a:p>
-            <a:pPr algn="ctr"/>
-            <a:r>
-              <a:rPr lang="zh-CN" altLang="en-US" sz="1200">
-                <a:solidFill>
-                  <a:schemeClr val="tx1"/>
-                </a:solidFill>
-              </a:rPr>
-              <a:t>核心</a:t>
-            </a:r>
-            <a:r>
-              <a:rPr lang="zh-CN" altLang="en-US" sz="1200">
-                <a:solidFill>
-                  <a:schemeClr val="tx1"/>
-                </a:solidFill>
-              </a:rPr>
-              <a:t>挑战</a:t>
-            </a:r>
-            <a:endParaRPr lang="zh-CN" altLang="en-US" sz="1200">
-              <a:solidFill>
-                <a:schemeClr val="tx1"/>
-              </a:solidFill>
-            </a:endParaRPr>
-          </a:p>
-        </p:txBody>
-      </p:sp>
-      <p:sp>
-        <p:nvSpPr>
-          <p:cNvPr id="53" name="矩形 52"/>
-          <p:cNvSpPr/>
-          <p:nvPr/>
-        </p:nvSpPr>
-        <p:spPr>
-          <a:xfrm>
-            <a:off x="8942705" y="535940"/>
-            <a:ext cx="1261745" cy="339725"/>
-          </a:xfrm>
-          <a:prstGeom prst="rect">
-            <a:avLst/>
-          </a:prstGeom>
-          <a:solidFill>
-            <a:schemeClr val="accent1">
-              <a:lumMod val="20000"/>
-              <a:lumOff val="80000"/>
-            </a:schemeClr>
-          </a:solidFill>
-        </p:spPr>
-        <p:style>
-          <a:lnRef idx="2">
-            <a:schemeClr val="accent1">
-              <a:lumMod val="75000"/>
-            </a:schemeClr>
-          </a:lnRef>
-          <a:fillRef idx="1">
-            <a:schemeClr val="accent1"/>
-          </a:fillRef>
-          <a:effectRef idx="0">
-            <a:srgbClr val="FFFFFF"/>
-          </a:effectRef>
-          <a:fontRef idx="minor">
-            <a:schemeClr val="lt1"/>
-          </a:fontRef>
-        </p:style>
-        <p:txBody>
-          <a:bodyPr rtlCol="0" anchor="ctr"/>
-          <a:p>
-            <a:pPr algn="ctr"/>
-            <a:r>
-              <a:rPr lang="zh-CN" altLang="en-US" sz="1200">
-                <a:solidFill>
-                  <a:schemeClr val="tx1"/>
-                </a:solidFill>
-              </a:rPr>
-              <a:t>研究</a:t>
-            </a:r>
-            <a:r>
-              <a:rPr lang="zh-CN" altLang="en-US" sz="1200">
-                <a:solidFill>
-                  <a:schemeClr val="tx1"/>
-                </a:solidFill>
-              </a:rPr>
-              <a:t>贡献</a:t>
-            </a:r>
-            <a:endParaRPr lang="zh-CN" altLang="en-US" sz="1200">
-              <a:solidFill>
-                <a:schemeClr val="tx1"/>
-              </a:solidFill>
-            </a:endParaRPr>
-          </a:p>
-        </p:txBody>
-      </p:sp>
-      <p:cxnSp>
-        <p:nvCxnSpPr>
-          <p:cNvPr id="55" name="直接箭头连接符 54"/>
-          <p:cNvCxnSpPr/>
-          <p:nvPr/>
-        </p:nvCxnSpPr>
-        <p:spPr>
-          <a:xfrm>
-            <a:off x="7126605" y="2161540"/>
-            <a:ext cx="0" cy="537845"/>
-          </a:xfrm>
-          <a:prstGeom prst="straightConnector1">
-            <a:avLst/>
-          </a:prstGeom>
-          <a:ln w="19050">
-            <a:solidFill>
-              <a:schemeClr val="tx2">
-                <a:lumMod val="60000"/>
-                <a:lumOff val="40000"/>
-              </a:schemeClr>
-            </a:solidFill>
-            <a:tailEnd type="arrow"/>
+            <a:tailEnd type="triangle"/>
           </a:ln>
         </p:spPr>
         <p:style>
@@ -5025,26 +3700,25 @@
       </p:cxnSp>
       <p:cxnSp>
         <p:nvCxnSpPr>
-          <p:cNvPr id="56" name="直接箭头连接符 55"/>
+          <p:cNvPr id="62" name="直接箭头连接符 61"/>
           <p:cNvCxnSpPr/>
           <p:nvPr/>
         </p:nvCxnSpPr>
         <p:spPr>
           <a:xfrm>
-            <a:off x="9596120" y="2161540"/>
-            <a:ext cx="0" cy="537845"/>
+            <a:off x="4233545" y="3486150"/>
+            <a:ext cx="1270" cy="681990"/>
           </a:xfrm>
           <a:prstGeom prst="straightConnector1">
             <a:avLst/>
           </a:prstGeom>
-          <a:ln w="19050">
+          <a:ln w="31750">
             <a:solidFill>
-              <a:schemeClr val="tx2">
-                <a:lumMod val="60000"/>
-                <a:lumOff val="40000"/>
+              <a:schemeClr val="accent2">
+                <a:lumMod val="50000"/>
               </a:schemeClr>
             </a:solidFill>
-            <a:tailEnd type="arrow"/>
+            <a:tailEnd type="triangle"/>
           </a:ln>
         </p:spPr>
         <p:style>
@@ -5064,26 +3738,25 @@
       </p:cxnSp>
       <p:cxnSp>
         <p:nvCxnSpPr>
-          <p:cNvPr id="57" name="直接箭头连接符 56"/>
+          <p:cNvPr id="64" name="直接箭头连接符 63"/>
           <p:cNvCxnSpPr/>
           <p:nvPr/>
         </p:nvCxnSpPr>
         <p:spPr>
           <a:xfrm>
-            <a:off x="4758055" y="4081780"/>
-            <a:ext cx="2540" cy="412750"/>
+            <a:off x="4218940" y="3488690"/>
+            <a:ext cx="4946400" cy="0"/>
           </a:xfrm>
           <a:prstGeom prst="straightConnector1">
             <a:avLst/>
           </a:prstGeom>
-          <a:ln w="19050">
+          <a:ln w="31750">
             <a:solidFill>
-              <a:schemeClr val="tx2">
-                <a:lumMod val="60000"/>
-                <a:lumOff val="40000"/>
+              <a:schemeClr val="accent2">
+                <a:lumMod val="50000"/>
               </a:schemeClr>
             </a:solidFill>
-            <a:tailEnd type="arrow"/>
+            <a:tailEnd type="none"/>
           </a:ln>
         </p:spPr>
         <p:style>
@@ -5103,118 +3776,14 @@
       </p:cxnSp>
       <p:sp>
         <p:nvSpPr>
-          <p:cNvPr id="60" name="圆角矩形 59"/>
-          <p:cNvSpPr/>
+          <p:cNvPr id="65" name="文本框 64"/>
+          <p:cNvSpPr txBox="1"/>
           <p:nvPr/>
         </p:nvSpPr>
         <p:spPr>
           <a:xfrm>
-            <a:off x="5878195" y="4471035"/>
-            <a:ext cx="2375535" cy="915670"/>
-          </a:xfrm>
-          <a:prstGeom prst="roundRect">
-            <a:avLst>
-              <a:gd name="adj" fmla="val 6084"/>
-            </a:avLst>
-          </a:prstGeom>
-          <a:solidFill>
-            <a:srgbClr val="31859B">
-              <a:alpha val="61000"/>
-            </a:srgbClr>
-          </a:solidFill>
-          <a:ln w="12700">
-            <a:solidFill>
-              <a:schemeClr val="tx1"/>
-            </a:solidFill>
-            <a:prstDash val="dash"/>
-          </a:ln>
-        </p:spPr>
-        <p:style>
-          <a:lnRef idx="2">
-            <a:schemeClr val="accent1">
-              <a:lumMod val="75000"/>
-            </a:schemeClr>
-          </a:lnRef>
-          <a:fillRef idx="1">
-            <a:schemeClr val="accent1"/>
-          </a:fillRef>
-          <a:effectRef idx="0">
-            <a:srgbClr val="FFFFFF"/>
-          </a:effectRef>
-          <a:fontRef idx="minor">
-            <a:schemeClr val="lt1"/>
-          </a:fontRef>
-        </p:style>
-        <p:txBody>
-          <a:bodyPr rtlCol="0" anchor="ctr"/>
-          <a:p>
-            <a:pPr algn="ctr"/>
-            <a:endParaRPr lang="zh-CN" altLang="en-US"/>
-          </a:p>
-        </p:txBody>
-      </p:sp>
-      <p:sp>
-        <p:nvSpPr>
-          <p:cNvPr id="61" name="圆角矩形 60"/>
-          <p:cNvSpPr/>
-          <p:nvPr/>
-        </p:nvSpPr>
-        <p:spPr>
-          <a:xfrm>
-            <a:off x="8380730" y="4448810"/>
-            <a:ext cx="2375535" cy="937260"/>
-          </a:xfrm>
-          <a:prstGeom prst="roundRect">
-            <a:avLst>
-              <a:gd name="adj" fmla="val 6084"/>
-            </a:avLst>
-          </a:prstGeom>
-          <a:solidFill>
-            <a:srgbClr val="EA700D">
-              <a:alpha val="61000"/>
-            </a:srgbClr>
-          </a:solidFill>
-          <a:ln w="12700">
-            <a:solidFill>
-              <a:schemeClr val="tx1"/>
-            </a:solidFill>
-            <a:prstDash val="dash"/>
-          </a:ln>
-        </p:spPr>
-        <p:style>
-          <a:lnRef idx="2">
-            <a:schemeClr val="accent1">
-              <a:lumMod val="75000"/>
-            </a:schemeClr>
-          </a:lnRef>
-          <a:fillRef idx="1">
-            <a:schemeClr val="accent1"/>
-          </a:fillRef>
-          <a:effectRef idx="0">
-            <a:srgbClr val="FFFFFF"/>
-          </a:effectRef>
-          <a:fontRef idx="minor">
-            <a:schemeClr val="lt1"/>
-          </a:fontRef>
-        </p:style>
-        <p:txBody>
-          <a:bodyPr rtlCol="0" anchor="ctr"/>
-          <a:p>
-            <a:pPr algn="ctr"/>
-            <a:endParaRPr lang="zh-CN" altLang="en-US"/>
-          </a:p>
-        </p:txBody>
-      </p:sp>
-      <p:sp>
-        <p:nvSpPr>
-          <p:cNvPr id="2" name="文本框 1"/>
-          <p:cNvSpPr txBox="1"/>
-          <p:nvPr/>
-        </p:nvSpPr>
-        <p:spPr>
-          <a:xfrm>
-            <a:off x="5878195" y="4494530"/>
-            <a:ext cx="2364740" cy="530860"/>
+            <a:off x="2549525" y="1986280"/>
+            <a:ext cx="1627505" cy="583565"/>
           </a:xfrm>
           <a:prstGeom prst="rect">
             <a:avLst/>
@@ -5223,90 +3792,47 @@
         </p:spPr>
         <p:txBody>
           <a:bodyPr wrap="square" rtlCol="0">
-            <a:noAutofit/>
+            <a:spAutoFit/>
           </a:bodyPr>
           <a:p>
             <a:pPr algn="ctr"/>
             <a:r>
-              <a:rPr lang="zh-CN" altLang="en-US" sz="1600" b="1"/>
-              <a:t>生成式网络态势感知的切片</a:t>
-            </a:r>
-            <a:r>
-              <a:rPr lang="en-US" altLang="zh-CN" sz="1600" b="1"/>
-              <a:t>-MAC</a:t>
-            </a:r>
-            <a:r>
-              <a:rPr lang="zh-CN" altLang="en-US" sz="1600" b="1"/>
-              <a:t>分层协作优化框架（第</a:t>
-            </a:r>
-            <a:r>
-              <a:rPr lang="zh-CN" altLang="en-US" sz="1600" b="1"/>
-              <a:t>五章</a:t>
-            </a:r>
-            <a:r>
-              <a:rPr lang="zh-CN" altLang="en-US" sz="1200" b="1"/>
-              <a:t>）</a:t>
-            </a:r>
-            <a:endParaRPr lang="zh-CN" altLang="en-US" sz="1200" b="1"/>
-          </a:p>
-        </p:txBody>
-      </p:sp>
-      <p:sp>
-        <p:nvSpPr>
-          <p:cNvPr id="3" name="文本框 2"/>
-          <p:cNvSpPr txBox="1"/>
-          <p:nvPr/>
-        </p:nvSpPr>
-        <p:spPr>
-          <a:xfrm>
-            <a:off x="8391525" y="4494530"/>
-            <a:ext cx="2364740" cy="530860"/>
-          </a:xfrm>
-          <a:prstGeom prst="rect">
-            <a:avLst/>
-          </a:prstGeom>
-          <a:noFill/>
-        </p:spPr>
-        <p:txBody>
-          <a:bodyPr wrap="square" rtlCol="0">
-            <a:noAutofit/>
-          </a:bodyPr>
+              <a:rPr lang="zh-CN" altLang="en-US" sz="1600"/>
+              <a:t>分布式管控的</a:t>
+            </a:r>
+            <a:endParaRPr lang="zh-CN" altLang="en-US" sz="1600"/>
+          </a:p>
           <a:p>
             <a:pPr algn="ctr"/>
             <a:r>
-              <a:rPr lang="zh-CN" altLang="en-US" sz="1600" b="1"/>
-              <a:t>基于任务反馈与协同增量重传的轻量化语义传输机制（第</a:t>
-            </a:r>
-            <a:r>
-              <a:rPr lang="zh-CN" altLang="en-US" sz="1600" b="1"/>
-              <a:t>六章）</a:t>
-            </a:r>
-            <a:endParaRPr lang="zh-CN" altLang="en-US" sz="1600" b="1"/>
+              <a:rPr lang="zh-CN" altLang="en-US" sz="1600"/>
+              <a:t>感知方法</a:t>
+            </a:r>
+            <a:endParaRPr lang="zh-CN" altLang="en-US" sz="1600"/>
           </a:p>
         </p:txBody>
       </p:sp>
       <p:cxnSp>
         <p:nvCxnSpPr>
-          <p:cNvPr id="78" name="直接箭头连接符 77"/>
+          <p:cNvPr id="67" name="直接连接符 66"/>
           <p:cNvCxnSpPr/>
           <p:nvPr/>
         </p:nvCxnSpPr>
         <p:spPr>
           <a:xfrm>
-            <a:off x="7124065" y="4039870"/>
-            <a:ext cx="2540" cy="412750"/>
+            <a:off x="2800985" y="3063240"/>
+            <a:ext cx="7635240" cy="0"/>
           </a:xfrm>
-          <a:prstGeom prst="straightConnector1">
+          <a:prstGeom prst="line">
             <a:avLst/>
           </a:prstGeom>
-          <a:ln w="19050">
+          <a:ln w="25400">
             <a:solidFill>
-              <a:schemeClr val="tx2">
-                <a:lumMod val="60000"/>
-                <a:lumOff val="40000"/>
+              <a:schemeClr val="bg1">
+                <a:lumMod val="50000"/>
               </a:schemeClr>
             </a:solidFill>
-            <a:tailEnd type="arrow"/>
+            <a:prstDash val="dash"/>
           </a:ln>
         </p:spPr>
         <p:style>
@@ -5324,109 +3850,16 @@
           </a:fontRef>
         </p:style>
       </p:cxnSp>
-      <p:cxnSp>
-        <p:nvCxnSpPr>
-          <p:cNvPr id="79" name="直接箭头连接符 78"/>
-          <p:cNvCxnSpPr/>
+      <p:sp>
+        <p:nvSpPr>
+          <p:cNvPr id="69" name="文本框 68"/>
+          <p:cNvSpPr txBox="1"/>
           <p:nvPr/>
-        </p:nvCxnSpPr>
+        </p:nvSpPr>
         <p:spPr>
           <a:xfrm>
-            <a:off x="9598660" y="4009390"/>
-            <a:ext cx="2540" cy="412750"/>
-          </a:xfrm>
-          <a:prstGeom prst="straightConnector1">
-            <a:avLst/>
-          </a:prstGeom>
-          <a:ln w="19050">
-            <a:solidFill>
-              <a:schemeClr val="tx2">
-                <a:lumMod val="60000"/>
-                <a:lumOff val="40000"/>
-              </a:schemeClr>
-            </a:solidFill>
-            <a:tailEnd type="arrow"/>
-          </a:ln>
-        </p:spPr>
-        <p:style>
-          <a:lnRef idx="2">
-            <a:schemeClr val="accent1"/>
-          </a:lnRef>
-          <a:fillRef idx="0">
-            <a:srgbClr val="FFFFFF"/>
-          </a:fillRef>
-          <a:effectRef idx="0">
-            <a:srgbClr val="FFFFFF"/>
-          </a:effectRef>
-          <a:fontRef idx="minor">
-            <a:schemeClr val="tx1"/>
-          </a:fontRef>
-        </p:style>
-      </p:cxnSp>
-      <p:sp>
-        <p:nvSpPr>
-          <p:cNvPr id="39" name="圆角矩形 38"/>
-          <p:cNvSpPr/>
-          <p:nvPr/>
-        </p:nvSpPr>
-        <p:spPr>
-          <a:xfrm>
-            <a:off x="4181475" y="1089660"/>
-            <a:ext cx="5926455" cy="331470"/>
-          </a:xfrm>
-          <a:prstGeom prst="roundRect">
-            <a:avLst/>
-          </a:prstGeom>
-          <a:solidFill>
-            <a:schemeClr val="accent4">
-              <a:lumMod val="20000"/>
-              <a:lumOff val="80000"/>
-              <a:alpha val="65000"/>
-            </a:schemeClr>
-          </a:solidFill>
-          <a:ln>
-            <a:solidFill>
-              <a:schemeClr val="bg1">
-                <a:lumMod val="50000"/>
-              </a:schemeClr>
-            </a:solidFill>
-            <a:prstDash val="dash"/>
-          </a:ln>
-        </p:spPr>
-        <p:style>
-          <a:lnRef idx="2">
-            <a:schemeClr val="accent1">
-              <a:lumMod val="75000"/>
-            </a:schemeClr>
-          </a:lnRef>
-          <a:fillRef idx="1">
-            <a:schemeClr val="accent1"/>
-          </a:fillRef>
-          <a:effectRef idx="0">
-            <a:srgbClr val="FFFFFF"/>
-          </a:effectRef>
-          <a:fontRef idx="minor">
-            <a:schemeClr val="lt1"/>
-          </a:fontRef>
-        </p:style>
-        <p:txBody>
-          <a:bodyPr rtlCol="0" anchor="ctr"/>
-          <a:p>
-            <a:pPr algn="ctr"/>
-            <a:endParaRPr lang="zh-CN" altLang="en-US"/>
-          </a:p>
-        </p:txBody>
-      </p:sp>
-      <p:sp>
-        <p:nvSpPr>
-          <p:cNvPr id="10" name="文本框 9"/>
-          <p:cNvSpPr txBox="1"/>
-          <p:nvPr/>
-        </p:nvSpPr>
-        <p:spPr>
-          <a:xfrm>
-            <a:off x="4314190" y="1045210"/>
-            <a:ext cx="5837555" cy="368300"/>
+            <a:off x="2549525" y="3063240"/>
+            <a:ext cx="1627505" cy="583565"/>
           </a:xfrm>
           <a:prstGeom prst="rect">
             <a:avLst/>
@@ -5438,64 +3871,37 @@
             <a:spAutoFit/>
           </a:bodyPr>
           <a:p>
-            <a:r>
-              <a:rPr lang="zh-CN" altLang="en-US" b="1">
-                <a:solidFill>
-                  <a:schemeClr val="tx1"/>
-                </a:solidFill>
-              </a:rPr>
-              <a:t>面向端到端</a:t>
-            </a:r>
-            <a:r>
-              <a:rPr lang="en-US" altLang="zh-CN" b="1">
-                <a:solidFill>
-                  <a:schemeClr val="tx1"/>
-                </a:solidFill>
-              </a:rPr>
-              <a:t>QoS</a:t>
-            </a:r>
-            <a:r>
-              <a:rPr lang="zh-CN" altLang="en-US" b="1">
-                <a:solidFill>
-                  <a:schemeClr val="tx1"/>
-                </a:solidFill>
-              </a:rPr>
-              <a:t>保障的</a:t>
-            </a:r>
-            <a:r>
-              <a:rPr lang="zh-CN" altLang="en-US" b="1">
-                <a:solidFill>
-                  <a:srgbClr val="C00000"/>
-                </a:solidFill>
-              </a:rPr>
-              <a:t>公平、高效、高可靠</a:t>
-            </a:r>
-            <a:r>
-              <a:rPr lang="zh-CN" altLang="en-US" b="1">
-                <a:solidFill>
-                  <a:schemeClr val="tx1"/>
-                </a:solidFill>
-              </a:rPr>
-              <a:t>分布式管控</a:t>
-            </a:r>
-            <a:endParaRPr lang="zh-CN" altLang="en-US" b="1">
-              <a:solidFill>
-                <a:schemeClr val="tx1"/>
-              </a:solidFill>
-            </a:endParaRPr>
-          </a:p>
-        </p:txBody>
-      </p:sp>
-      <p:sp>
-        <p:nvSpPr>
-          <p:cNvPr id="47" name="右箭头 46"/>
+            <a:pPr algn="ctr"/>
+            <a:r>
+              <a:rPr lang="zh-CN" altLang="en-US" sz="1600"/>
+              <a:t>分布式管控的</a:t>
+            </a:r>
+            <a:endParaRPr lang="zh-CN" altLang="en-US" sz="1600"/>
+          </a:p>
+          <a:p>
+            <a:pPr algn="ctr"/>
+            <a:r>
+              <a:rPr lang="zh-CN" altLang="en-US" sz="1600"/>
+              <a:t>资源调度</a:t>
+            </a:r>
+            <a:r>
+              <a:rPr lang="zh-CN" altLang="en-US" sz="1600"/>
+              <a:t>方法</a:t>
+            </a:r>
+            <a:endParaRPr lang="zh-CN" altLang="en-US" sz="1600"/>
+          </a:p>
+        </p:txBody>
+      </p:sp>
+      <p:sp>
+        <p:nvSpPr>
+          <p:cNvPr id="70" name="右箭头 69"/>
           <p:cNvSpPr/>
           <p:nvPr/>
         </p:nvSpPr>
         <p:spPr>
           <a:xfrm rot="5400000">
-            <a:off x="7032625" y="1445260"/>
-            <a:ext cx="192405" cy="144145"/>
+            <a:off x="3079750" y="2750185"/>
+            <a:ext cx="566420" cy="144145"/>
           </a:xfrm>
           <a:prstGeom prst="rightArrow">
             <a:avLst/>
@@ -5525,192 +3931,71 @@
           </a:p>
         </p:txBody>
       </p:sp>
-      <p:sp>
-        <p:nvSpPr>
-          <p:cNvPr id="58" name="右箭头 57"/>
-          <p:cNvSpPr/>
+      <p:cxnSp>
+        <p:nvCxnSpPr>
+          <p:cNvPr id="71" name="直接箭头连接符 70"/>
+          <p:cNvCxnSpPr/>
           <p:nvPr/>
-        </p:nvSpPr>
+        </p:nvCxnSpPr>
         <p:spPr>
-          <a:xfrm rot="5400000">
-            <a:off x="8996045" y="1445260"/>
-            <a:ext cx="192405" cy="144145"/>
+          <a:xfrm>
+            <a:off x="9164320" y="3497580"/>
+            <a:ext cx="1270" cy="681990"/>
           </a:xfrm>
-          <a:prstGeom prst="rightArrow">
+          <a:prstGeom prst="straightConnector1">
             <a:avLst/>
           </a:prstGeom>
+          <a:ln w="31750">
+            <a:solidFill>
+              <a:schemeClr val="accent2">
+                <a:lumMod val="50000"/>
+              </a:schemeClr>
+            </a:solidFill>
+            <a:tailEnd type="triangle"/>
+          </a:ln>
         </p:spPr>
         <p:style>
           <a:lnRef idx="2">
-            <a:schemeClr val="accent1">
-              <a:lumMod val="75000"/>
-            </a:schemeClr>
+            <a:schemeClr val="accent1"/>
           </a:lnRef>
-          <a:fillRef idx="1">
-            <a:schemeClr val="accent1"/>
+          <a:fillRef idx="0">
+            <a:srgbClr val="FFFFFF"/>
           </a:fillRef>
           <a:effectRef idx="0">
             <a:srgbClr val="FFFFFF"/>
           </a:effectRef>
           <a:fontRef idx="minor">
-            <a:schemeClr val="lt1"/>
+            <a:schemeClr val="tx1"/>
           </a:fontRef>
         </p:style>
-        <p:txBody>
-          <a:bodyPr rtlCol="0" anchor="ctr"/>
-          <a:p>
-            <a:pPr algn="ctr"/>
-            <a:endParaRPr lang="zh-CN" altLang="en-US"/>
-          </a:p>
-        </p:txBody>
-      </p:sp>
-      <p:sp>
-        <p:nvSpPr>
-          <p:cNvPr id="59" name="右箭头 58"/>
+      </p:cxnSp>
+      <p:sp>
+        <p:nvSpPr>
+          <p:cNvPr id="72" name="矩形 71"/>
           <p:cNvSpPr/>
           <p:nvPr/>
         </p:nvSpPr>
         <p:spPr>
-          <a:xfrm rot="5400000">
-            <a:off x="4824730" y="1445260"/>
-            <a:ext cx="192405" cy="144145"/>
-          </a:xfrm>
-          <a:prstGeom prst="rightArrow">
-            <a:avLst/>
-          </a:prstGeom>
-        </p:spPr>
-        <p:style>
-          <a:lnRef idx="2">
-            <a:schemeClr val="accent1">
-              <a:lumMod val="75000"/>
-            </a:schemeClr>
-          </a:lnRef>
-          <a:fillRef idx="1">
-            <a:schemeClr val="accent1"/>
-          </a:fillRef>
-          <a:effectRef idx="0">
-            <a:srgbClr val="FFFFFF"/>
-          </a:effectRef>
-          <a:fontRef idx="minor">
-            <a:schemeClr val="lt1"/>
-          </a:fontRef>
-        </p:style>
-        <p:txBody>
-          <a:bodyPr rtlCol="0" anchor="ctr"/>
-          <a:p>
-            <a:pPr algn="ctr"/>
-            <a:endParaRPr lang="zh-CN" altLang="en-US"/>
-          </a:p>
-        </p:txBody>
-      </p:sp>
-      <p:sp>
-        <p:nvSpPr>
-          <p:cNvPr id="68" name="圆角矩形 67"/>
-          <p:cNvSpPr/>
-          <p:nvPr/>
-        </p:nvSpPr>
-        <p:spPr>
           <a:xfrm>
-            <a:off x="4999355" y="3345180"/>
-            <a:ext cx="5873115" cy="736600"/>
-          </a:xfrm>
-          <a:prstGeom prst="roundRect">
-            <a:avLst>
-              <a:gd name="adj" fmla="val 7642"/>
-            </a:avLst>
-          </a:prstGeom>
-          <a:solidFill>
-            <a:schemeClr val="accent4">
-              <a:lumMod val="40000"/>
-              <a:lumOff val="60000"/>
-            </a:schemeClr>
-          </a:solidFill>
-        </p:spPr>
-        <p:style>
-          <a:lnRef idx="2">
-            <a:schemeClr val="lt1"/>
-          </a:lnRef>
-          <a:fillRef idx="1">
-            <a:schemeClr val="accent1"/>
-          </a:fillRef>
-          <a:effectRef idx="1">
-            <a:schemeClr val="accent1"/>
-          </a:effectRef>
-          <a:fontRef idx="minor">
-            <a:schemeClr val="lt1"/>
-          </a:fontRef>
-        </p:style>
-        <p:txBody>
-          <a:bodyPr rtlCol="0" anchor="ctr"/>
-          <a:p>
-            <a:pPr algn="ctr"/>
-            <a:endParaRPr lang="zh-CN" altLang="en-US">
-              <a:solidFill>
-                <a:schemeClr val="tx1"/>
-              </a:solidFill>
-            </a:endParaRPr>
-          </a:p>
-        </p:txBody>
-      </p:sp>
-      <p:sp>
-        <p:nvSpPr>
-          <p:cNvPr id="76" name="文本框 75"/>
-          <p:cNvSpPr txBox="1"/>
-          <p:nvPr/>
-        </p:nvSpPr>
-        <p:spPr>
-          <a:xfrm>
-            <a:off x="3930650" y="4197985"/>
-            <a:ext cx="1008380" cy="245110"/>
+            <a:off x="4234815" y="3494405"/>
+            <a:ext cx="1115695" cy="382905"/>
           </a:xfrm>
           <a:prstGeom prst="rect">
             <a:avLst/>
           </a:prstGeom>
-          <a:noFill/>
-        </p:spPr>
-        <p:txBody>
-          <a:bodyPr wrap="square" rtlCol="0">
-            <a:spAutoFit/>
-          </a:bodyPr>
-          <a:p>
-            <a:r>
-              <a:rPr lang="en-US" altLang="zh-CN" sz="1000" b="1"/>
-              <a:t>--</a:t>
-            </a:r>
-            <a:r>
-              <a:rPr lang="zh-CN" altLang="en-US" sz="1000" b="1"/>
-              <a:t>分布式</a:t>
-            </a:r>
-            <a:r>
-              <a:rPr lang="zh-CN" altLang="en-US" sz="1000" b="1"/>
-              <a:t>决策</a:t>
-            </a:r>
-            <a:endParaRPr lang="zh-CN" altLang="en-US" sz="1000" b="1"/>
-          </a:p>
-        </p:txBody>
-      </p:sp>
-      <p:sp>
-        <p:nvSpPr>
-          <p:cNvPr id="77" name="流程图: 延期 76"/>
-          <p:cNvSpPr/>
-          <p:nvPr/>
-        </p:nvSpPr>
-        <p:spPr>
-          <a:xfrm rot="5400000">
-            <a:off x="5280660" y="3135630"/>
-            <a:ext cx="158750" cy="647700"/>
-          </a:xfrm>
-          <a:prstGeom prst="flowChartDelay">
-            <a:avLst/>
-          </a:prstGeom>
-          <a:noFill/>
-          <a:ln>
+          <a:solidFill>
+            <a:schemeClr val="accent1">
+              <a:lumMod val="20000"/>
+              <a:lumOff val="80000"/>
+            </a:schemeClr>
+          </a:solidFill>
+          <a:ln w="28575">
             <a:solidFill>
               <a:schemeClr val="bg1">
                 <a:lumMod val="50000"/>
               </a:schemeClr>
             </a:solidFill>
-            <a:prstDash val="sysDash"/>
+            <a:prstDash val="dashDot"/>
           </a:ln>
         </p:spPr>
         <p:style>
@@ -5733,261 +4018,65 @@
           <a:bodyPr rtlCol="0" anchor="ctr"/>
           <a:p>
             <a:pPr algn="ctr"/>
-            <a:endParaRPr lang="zh-CN" altLang="en-US"/>
-          </a:p>
-        </p:txBody>
-      </p:sp>
-      <p:sp>
-        <p:nvSpPr>
-          <p:cNvPr id="82" name="文本框 81"/>
-          <p:cNvSpPr txBox="1"/>
+            <a:r>
+              <a:rPr lang="zh-CN" altLang="en-US" sz="1200" b="1">
+                <a:solidFill>
+                  <a:schemeClr val="tx1"/>
+                </a:solidFill>
+              </a:rPr>
+              <a:t>接入</a:t>
+            </a:r>
+            <a:endParaRPr lang="zh-CN" altLang="en-US" sz="1200" b="1">
+              <a:solidFill>
+                <a:schemeClr val="tx1"/>
+              </a:solidFill>
+            </a:endParaRPr>
+          </a:p>
+          <a:p>
+            <a:pPr algn="ctr"/>
+            <a:r>
+              <a:rPr lang="zh-CN" altLang="en-US" sz="1200" b="1">
+                <a:solidFill>
+                  <a:schemeClr val="tx1"/>
+                </a:solidFill>
+              </a:rPr>
+              <a:t>覆盖连续性</a:t>
+            </a:r>
+            <a:endParaRPr lang="zh-CN" altLang="en-US" sz="1200" b="1">
+              <a:solidFill>
+                <a:schemeClr val="tx1"/>
+              </a:solidFill>
+            </a:endParaRPr>
+          </a:p>
+        </p:txBody>
+      </p:sp>
+      <p:sp>
+        <p:nvSpPr>
+          <p:cNvPr id="74" name="矩形 73"/>
+          <p:cNvSpPr/>
           <p:nvPr/>
         </p:nvSpPr>
         <p:spPr>
           <a:xfrm>
-            <a:off x="5624195" y="3345180"/>
-            <a:ext cx="1012190" cy="245110"/>
-          </a:xfrm>
-          <a:prstGeom prst="rect">
-            <a:avLst/>
-          </a:prstGeom>
-          <a:noFill/>
-        </p:spPr>
-        <p:txBody>
-          <a:bodyPr wrap="square" rtlCol="0">
-            <a:spAutoFit/>
-          </a:bodyPr>
-          <a:p>
-            <a:r>
-              <a:rPr lang="en-US" altLang="zh-CN" sz="1000" b="1"/>
-              <a:t>--</a:t>
-            </a:r>
-            <a:r>
-              <a:rPr lang="zh-CN" altLang="en-US" sz="1000" b="1"/>
-              <a:t>分布式</a:t>
-            </a:r>
-            <a:r>
-              <a:rPr lang="zh-CN" altLang="en-US" sz="1000" b="1"/>
-              <a:t>感知</a:t>
-            </a:r>
-            <a:endParaRPr lang="zh-CN" altLang="en-US" sz="1000" b="1"/>
-          </a:p>
-        </p:txBody>
-      </p:sp>
-      <p:sp>
-        <p:nvSpPr>
-          <p:cNvPr id="95" name="文本框 94"/>
-          <p:cNvSpPr txBox="1"/>
-          <p:nvPr/>
-        </p:nvSpPr>
-        <p:spPr>
-          <a:xfrm>
-            <a:off x="5003165" y="3319780"/>
-            <a:ext cx="1012190" cy="245110"/>
-          </a:xfrm>
-          <a:prstGeom prst="rect">
-            <a:avLst/>
-          </a:prstGeom>
-          <a:noFill/>
-        </p:spPr>
-        <p:txBody>
-          <a:bodyPr wrap="square" rtlCol="0">
-            <a:spAutoFit/>
-          </a:bodyPr>
-          <a:p>
-            <a:r>
-              <a:rPr lang="zh-CN" altLang="en-US" sz="1000" b="1"/>
-              <a:t>技术</a:t>
-            </a:r>
-            <a:r>
-              <a:rPr lang="zh-CN" altLang="en-US" sz="1000" b="1"/>
-              <a:t>方案</a:t>
-            </a:r>
-            <a:endParaRPr lang="zh-CN" altLang="en-US" sz="1000" b="1"/>
-          </a:p>
-        </p:txBody>
-      </p:sp>
-      <p:cxnSp>
-        <p:nvCxnSpPr>
-          <p:cNvPr id="98" name="直接箭头连接符 97"/>
-          <p:cNvCxnSpPr/>
-          <p:nvPr/>
-        </p:nvCxnSpPr>
-        <p:spPr>
-          <a:xfrm flipH="1">
-            <a:off x="9580880" y="3223895"/>
-            <a:ext cx="0" cy="85725"/>
-          </a:xfrm>
-          <a:prstGeom prst="straightConnector1">
-            <a:avLst/>
-          </a:prstGeom>
-          <a:ln w="19050">
-            <a:solidFill>
-              <a:schemeClr val="tx2">
-                <a:lumMod val="60000"/>
-                <a:lumOff val="40000"/>
-              </a:schemeClr>
-            </a:solidFill>
-            <a:tailEnd type="none"/>
-          </a:ln>
-        </p:spPr>
-        <p:style>
-          <a:lnRef idx="2">
-            <a:schemeClr val="accent1"/>
-          </a:lnRef>
-          <a:fillRef idx="0">
-            <a:srgbClr val="FFFFFF"/>
-          </a:fillRef>
-          <a:effectRef idx="0">
-            <a:srgbClr val="FFFFFF"/>
-          </a:effectRef>
-          <a:fontRef idx="minor">
-            <a:schemeClr val="tx1"/>
-          </a:fontRef>
-        </p:style>
-      </p:cxnSp>
-      <p:cxnSp>
-        <p:nvCxnSpPr>
-          <p:cNvPr id="108" name="直接箭头连接符 107"/>
-          <p:cNvCxnSpPr/>
-          <p:nvPr/>
-        </p:nvCxnSpPr>
-        <p:spPr>
-          <a:xfrm flipH="1">
-            <a:off x="7126605" y="3223895"/>
-            <a:ext cx="0" cy="85725"/>
-          </a:xfrm>
-          <a:prstGeom prst="straightConnector1">
-            <a:avLst/>
-          </a:prstGeom>
-          <a:ln w="19050">
-            <a:solidFill>
-              <a:schemeClr val="tx2">
-                <a:lumMod val="60000"/>
-                <a:lumOff val="40000"/>
-              </a:schemeClr>
-            </a:solidFill>
-            <a:tailEnd type="none"/>
-          </a:ln>
-        </p:spPr>
-        <p:style>
-          <a:lnRef idx="2">
-            <a:schemeClr val="accent1"/>
-          </a:lnRef>
-          <a:fillRef idx="0">
-            <a:srgbClr val="FFFFFF"/>
-          </a:fillRef>
-          <a:effectRef idx="0">
-            <a:srgbClr val="FFFFFF"/>
-          </a:effectRef>
-          <a:fontRef idx="minor">
-            <a:schemeClr val="tx1"/>
-          </a:fontRef>
-        </p:style>
-      </p:cxnSp>
-      <p:cxnSp>
-        <p:nvCxnSpPr>
-          <p:cNvPr id="109" name="直接箭头连接符 108"/>
-          <p:cNvCxnSpPr/>
-          <p:nvPr/>
-        </p:nvCxnSpPr>
-        <p:spPr>
-          <a:xfrm flipH="1">
-            <a:off x="4755515" y="3223895"/>
-            <a:ext cx="0" cy="85725"/>
-          </a:xfrm>
-          <a:prstGeom prst="straightConnector1">
-            <a:avLst/>
-          </a:prstGeom>
-          <a:ln w="19050">
-            <a:solidFill>
-              <a:schemeClr val="tx2">
-                <a:lumMod val="60000"/>
-                <a:lumOff val="40000"/>
-              </a:schemeClr>
-            </a:solidFill>
-            <a:tailEnd type="none"/>
-          </a:ln>
-        </p:spPr>
-        <p:style>
-          <a:lnRef idx="2">
-            <a:schemeClr val="accent1"/>
-          </a:lnRef>
-          <a:fillRef idx="0">
-            <a:srgbClr val="FFFFFF"/>
-          </a:fillRef>
-          <a:effectRef idx="0">
-            <a:srgbClr val="FFFFFF"/>
-          </a:effectRef>
-          <a:fontRef idx="minor">
-            <a:schemeClr val="tx1"/>
-          </a:fontRef>
-        </p:style>
-      </p:cxnSp>
-      <p:sp>
-        <p:nvSpPr>
-          <p:cNvPr id="111" name="文本框 110"/>
-          <p:cNvSpPr txBox="1"/>
-          <p:nvPr/>
-        </p:nvSpPr>
-        <p:spPr>
-          <a:xfrm>
-            <a:off x="5338445" y="3538855"/>
-            <a:ext cx="5194300" cy="300355"/>
-          </a:xfrm>
-          <a:prstGeom prst="rect">
-            <a:avLst/>
-          </a:prstGeom>
-          <a:noFill/>
-        </p:spPr>
-        <p:txBody>
-          <a:bodyPr wrap="square" rtlCol="0">
-            <a:noAutofit/>
-          </a:bodyPr>
-          <a:p>
-            <a:pPr algn="ctr"/>
-            <a:r>
-              <a:rPr lang="zh-CN" altLang="en-US" sz="1600" b="1"/>
-              <a:t>多源置信度调控的分布式网络状态感知框架（第</a:t>
-            </a:r>
-            <a:r>
-              <a:rPr lang="zh-CN" altLang="en-US" sz="1600" b="1"/>
-              <a:t>三章）</a:t>
-            </a:r>
-            <a:endParaRPr lang="zh-CN" altLang="en-US" sz="1600" b="1"/>
-          </a:p>
-          <a:p>
-            <a:pPr algn="ctr"/>
-            <a:endParaRPr lang="zh-CN" altLang="en-US" sz="1600" b="1"/>
-          </a:p>
-        </p:txBody>
-      </p:sp>
-      <p:sp>
-        <p:nvSpPr>
-          <p:cNvPr id="6" name="矩形 5"/>
-          <p:cNvSpPr/>
-          <p:nvPr/>
-        </p:nvSpPr>
-        <p:spPr>
-          <a:xfrm>
-            <a:off x="3314065" y="3380105"/>
-            <a:ext cx="1339850" cy="701675"/>
+            <a:off x="6588760" y="3497580"/>
+            <a:ext cx="1115695" cy="382905"/>
           </a:xfrm>
           <a:prstGeom prst="rect">
             <a:avLst/>
           </a:prstGeom>
           <a:solidFill>
-            <a:schemeClr val="accent4">
+            <a:schemeClr val="accent1">
               <a:lumMod val="20000"/>
               <a:lumOff val="80000"/>
             </a:schemeClr>
           </a:solidFill>
-          <a:ln>
+          <a:ln w="28575">
             <a:solidFill>
               <a:schemeClr val="bg1">
                 <a:lumMod val="50000"/>
               </a:schemeClr>
             </a:solidFill>
+            <a:prstDash val="dashDot"/>
           </a:ln>
         </p:spPr>
         <p:style>
@@ -6011,123 +4100,215 @@
           <a:p>
             <a:pPr algn="ctr"/>
             <a:r>
-              <a:rPr lang="zh-CN" altLang="en-US" sz="1200">
+              <a:rPr lang="zh-CN" altLang="en-US" sz="1200" b="1">
                 <a:solidFill>
                   <a:schemeClr val="tx1"/>
                 </a:solidFill>
               </a:rPr>
-              <a:t>退化</a:t>
-            </a:r>
-            <a:r>
-              <a:rPr lang="zh-CN" altLang="en-US" sz="1200">
+              <a:t>无线资源分配</a:t>
+            </a:r>
+            <a:endParaRPr lang="zh-CN" altLang="en-US" sz="1200" b="1">
+              <a:solidFill>
+                <a:schemeClr val="tx1"/>
+              </a:solidFill>
+            </a:endParaRPr>
+          </a:p>
+          <a:p>
+            <a:pPr algn="ctr"/>
+            <a:r>
+              <a:rPr lang="en-US" altLang="zh-CN" sz="1200" b="1">
                 <a:solidFill>
                   <a:schemeClr val="tx1"/>
                 </a:solidFill>
               </a:rPr>
-              <a:t>遥测下</a:t>
-            </a:r>
-            <a:endParaRPr lang="zh-CN" altLang="en-US" sz="1200">
+              <a:t>QoS</a:t>
+            </a:r>
+            <a:r>
+              <a:rPr lang="zh-CN" altLang="en-US" sz="1200" b="1">
+                <a:solidFill>
+                  <a:schemeClr val="tx1"/>
+                </a:solidFill>
+              </a:rPr>
+              <a:t>保障</a:t>
+            </a:r>
+            <a:endParaRPr lang="zh-CN" altLang="en-US" sz="1200" b="1">
               <a:solidFill>
                 <a:schemeClr val="tx1"/>
               </a:solidFill>
             </a:endParaRPr>
           </a:p>
-          <a:p>
-            <a:pPr algn="ctr"/>
-            <a:r>
-              <a:rPr lang="zh-CN" altLang="en-US" sz="1200" b="1">
-                <a:solidFill>
-                  <a:srgbClr val="C00000"/>
-                </a:solidFill>
-              </a:rPr>
-              <a:t>本地视图不</a:t>
-            </a:r>
-            <a:r>
-              <a:rPr lang="zh-CN" altLang="en-US" sz="1200" b="1">
-                <a:solidFill>
-                  <a:srgbClr val="C00000"/>
-                </a:solidFill>
-              </a:rPr>
-              <a:t>可信</a:t>
-            </a:r>
-            <a:endParaRPr lang="zh-CN" altLang="en-US" sz="1200" b="1">
-              <a:solidFill>
-                <a:srgbClr val="C00000"/>
-              </a:solidFill>
-            </a:endParaRPr>
-          </a:p>
-        </p:txBody>
-      </p:sp>
-      <p:sp>
-        <p:nvSpPr>
-          <p:cNvPr id="113" name="文本框 112"/>
-          <p:cNvSpPr txBox="1"/>
+        </p:txBody>
+      </p:sp>
+      <p:sp>
+        <p:nvSpPr>
+          <p:cNvPr id="80" name="矩形 79"/>
+          <p:cNvSpPr/>
           <p:nvPr/>
         </p:nvSpPr>
         <p:spPr>
           <a:xfrm>
-            <a:off x="3864610" y="3081020"/>
-            <a:ext cx="428625" cy="429895"/>
+            <a:off x="6644640" y="2028190"/>
+            <a:ext cx="1115695" cy="382905"/>
           </a:xfrm>
           <a:prstGeom prst="rect">
             <a:avLst/>
           </a:prstGeom>
-          <a:noFill/>
-        </p:spPr>
-        <p:txBody>
-          <a:bodyPr wrap="square" rtlCol="0">
-            <a:spAutoFit/>
-          </a:bodyPr>
-          <a:p>
-            <a:r>
-              <a:rPr lang="en-US" altLang="zh-CN" sz="2200" b="1"/>
-              <a:t>+</a:t>
-            </a:r>
-            <a:endParaRPr lang="en-US" altLang="zh-CN" sz="2200" b="1"/>
-          </a:p>
-        </p:txBody>
-      </p:sp>
-      <p:cxnSp>
-        <p:nvCxnSpPr>
-          <p:cNvPr id="114" name="直接箭头连接符 113"/>
-          <p:cNvCxnSpPr>
-            <a:endCxn id="68" idx="1"/>
-          </p:cNvCxnSpPr>
-          <p:nvPr/>
-        </p:nvCxnSpPr>
-        <p:spPr>
-          <a:xfrm>
-            <a:off x="4653915" y="3669030"/>
-            <a:ext cx="345440" cy="0"/>
-          </a:xfrm>
-          <a:prstGeom prst="straightConnector1">
-            <a:avLst/>
-          </a:prstGeom>
-          <a:ln w="19050">
+          <a:solidFill>
+            <a:schemeClr val="accent1">
+              <a:lumMod val="20000"/>
+              <a:lumOff val="80000"/>
+            </a:schemeClr>
+          </a:solidFill>
+          <a:ln w="28575">
             <a:solidFill>
-              <a:schemeClr val="tx2">
-                <a:lumMod val="60000"/>
-                <a:lumOff val="40000"/>
+              <a:schemeClr val="bg1">
+                <a:lumMod val="50000"/>
               </a:schemeClr>
             </a:solidFill>
-            <a:tailEnd type="arrow"/>
+            <a:prstDash val="dashDot"/>
           </a:ln>
         </p:spPr>
         <p:style>
           <a:lnRef idx="2">
+            <a:schemeClr val="accent1">
+              <a:lumMod val="75000"/>
+            </a:schemeClr>
+          </a:lnRef>
+          <a:fillRef idx="1">
             <a:schemeClr val="accent1"/>
-          </a:lnRef>
-          <a:fillRef idx="0">
-            <a:srgbClr val="FFFFFF"/>
           </a:fillRef>
           <a:effectRef idx="0">
             <a:srgbClr val="FFFFFF"/>
           </a:effectRef>
           <a:fontRef idx="minor">
-            <a:schemeClr val="tx1"/>
+            <a:schemeClr val="lt1"/>
           </a:fontRef>
         </p:style>
-      </p:cxnSp>
+        <p:txBody>
+          <a:bodyPr rtlCol="0" anchor="ctr"/>
+          <a:p>
+            <a:pPr algn="ctr"/>
+            <a:r>
+              <a:rPr lang="zh-CN" altLang="en-US" sz="1200" b="1">
+                <a:solidFill>
+                  <a:schemeClr val="tx1"/>
+                </a:solidFill>
+              </a:rPr>
+              <a:t>节点间</a:t>
+            </a:r>
+            <a:endParaRPr lang="zh-CN" altLang="en-US" sz="1200" b="1">
+              <a:solidFill>
+                <a:schemeClr val="tx1"/>
+              </a:solidFill>
+            </a:endParaRPr>
+          </a:p>
+          <a:p>
+            <a:pPr algn="ctr"/>
+            <a:r>
+              <a:rPr lang="zh-CN" altLang="en-US" sz="1200" b="1">
+                <a:solidFill>
+                  <a:schemeClr val="tx1"/>
+                </a:solidFill>
+              </a:rPr>
+              <a:t>分布式协作</a:t>
+            </a:r>
+            <a:endParaRPr lang="zh-CN" altLang="en-US" sz="1200" b="1">
+              <a:solidFill>
+                <a:schemeClr val="tx1"/>
+              </a:solidFill>
+            </a:endParaRPr>
+          </a:p>
+        </p:txBody>
+      </p:sp>
+      <p:sp>
+        <p:nvSpPr>
+          <p:cNvPr id="81" name="矩形 80"/>
+          <p:cNvSpPr/>
+          <p:nvPr/>
+        </p:nvSpPr>
+        <p:spPr>
+          <a:xfrm>
+            <a:off x="9193530" y="3487420"/>
+            <a:ext cx="1115695" cy="382905"/>
+          </a:xfrm>
+          <a:prstGeom prst="rect">
+            <a:avLst/>
+          </a:prstGeom>
+          <a:solidFill>
+            <a:schemeClr val="accent1">
+              <a:lumMod val="20000"/>
+              <a:lumOff val="80000"/>
+            </a:schemeClr>
+          </a:solidFill>
+          <a:ln w="28575">
+            <a:solidFill>
+              <a:schemeClr val="bg1">
+                <a:lumMod val="50000"/>
+              </a:schemeClr>
+            </a:solidFill>
+            <a:prstDash val="dashDot"/>
+          </a:ln>
+        </p:spPr>
+        <p:style>
+          <a:lnRef idx="2">
+            <a:schemeClr val="accent1">
+              <a:lumMod val="75000"/>
+            </a:schemeClr>
+          </a:lnRef>
+          <a:fillRef idx="1">
+            <a:schemeClr val="accent1"/>
+          </a:fillRef>
+          <a:effectRef idx="0">
+            <a:srgbClr val="FFFFFF"/>
+          </a:effectRef>
+          <a:fontRef idx="minor">
+            <a:schemeClr val="lt1"/>
+          </a:fontRef>
+        </p:style>
+        <p:txBody>
+          <a:bodyPr rtlCol="0" anchor="ctr"/>
+          <a:p>
+            <a:pPr algn="ctr"/>
+            <a:r>
+              <a:rPr lang="zh-CN" altLang="en-US" sz="1200" b="1">
+                <a:solidFill>
+                  <a:schemeClr val="tx1"/>
+                </a:solidFill>
+              </a:rPr>
+              <a:t>端到端传输</a:t>
+            </a:r>
+            <a:endParaRPr lang="zh-CN" altLang="en-US" sz="1200" b="1">
+              <a:solidFill>
+                <a:schemeClr val="tx1"/>
+              </a:solidFill>
+            </a:endParaRPr>
+          </a:p>
+          <a:p>
+            <a:pPr algn="ctr"/>
+            <a:r>
+              <a:rPr lang="zh-CN" altLang="en-US" sz="1200" b="1">
+                <a:solidFill>
+                  <a:schemeClr val="tx1"/>
+                </a:solidFill>
+              </a:rPr>
+              <a:t>信息</a:t>
+            </a:r>
+            <a:r>
+              <a:rPr lang="zh-CN" altLang="en-US" sz="1200" b="1">
+                <a:solidFill>
+                  <a:schemeClr val="tx1"/>
+                </a:solidFill>
+              </a:rPr>
+              <a:t>保真</a:t>
+            </a:r>
+            <a:endParaRPr lang="zh-CN" altLang="en-US" sz="1200" b="1">
+              <a:solidFill>
+                <a:schemeClr val="tx1"/>
+              </a:solidFill>
+            </a:endParaRPr>
+          </a:p>
+        </p:txBody>
+      </p:sp>
     </p:spTree>
   </p:cSld>
   <p:clrMapOvr>

--- a/figures/ppt/研究框架-精简.pptx
+++ b/figures/ppt/研究框架-精简.pptx
@@ -4309,6 +4309,126 @@
           </a:p>
         </p:txBody>
       </p:sp>
+      <p:sp>
+        <p:nvSpPr>
+          <p:cNvPr id="5" name="圆角矩形 4"/>
+          <p:cNvSpPr/>
+          <p:nvPr/>
+        </p:nvSpPr>
+        <p:spPr>
+          <a:xfrm>
+            <a:off x="2973070" y="5248275"/>
+            <a:ext cx="7336790" cy="553085"/>
+          </a:xfrm>
+          <a:prstGeom prst="roundRect">
+            <a:avLst/>
+          </a:prstGeom>
+          <a:solidFill>
+            <a:schemeClr val="accent1">
+              <a:lumMod val="40000"/>
+              <a:lumOff val="60000"/>
+            </a:schemeClr>
+          </a:solidFill>
+          <a:ln w="19050">
+            <a:solidFill>
+              <a:schemeClr val="bg1">
+                <a:lumMod val="50000"/>
+              </a:schemeClr>
+            </a:solidFill>
+          </a:ln>
+        </p:spPr>
+        <p:style>
+          <a:lnRef idx="2">
+            <a:schemeClr val="accent1">
+              <a:lumMod val="75000"/>
+            </a:schemeClr>
+          </a:lnRef>
+          <a:fillRef idx="1">
+            <a:schemeClr val="accent1"/>
+          </a:fillRef>
+          <a:effectRef idx="0">
+            <a:srgbClr val="FFFFFF"/>
+          </a:effectRef>
+          <a:fontRef idx="minor">
+            <a:schemeClr val="lt1"/>
+          </a:fontRef>
+        </p:style>
+        <p:txBody>
+          <a:bodyPr rtlCol="0" anchor="ctr"/>
+          <a:p>
+            <a:pPr algn="ctr"/>
+            <a:r>
+              <a:rPr lang="zh-CN" altLang="en-US" sz="1600" b="1">
+                <a:solidFill>
+                  <a:schemeClr val="tx1"/>
+                </a:solidFill>
+              </a:rPr>
+              <a:t>第七章</a:t>
+            </a:r>
+            <a:r>
+              <a:rPr lang="en-US" altLang="zh-CN" sz="1600" b="1">
+                <a:solidFill>
+                  <a:schemeClr val="tx1"/>
+                </a:solidFill>
+              </a:rPr>
+              <a:t> </a:t>
+            </a:r>
+            <a:r>
+              <a:rPr lang="zh-CN" altLang="en-US" sz="1600" b="1">
+                <a:solidFill>
+                  <a:schemeClr val="tx1"/>
+                </a:solidFill>
+              </a:rPr>
+              <a:t>结论</a:t>
+            </a:r>
+            <a:r>
+              <a:rPr lang="en-US" altLang="zh-CN" sz="1600" b="1">
+                <a:solidFill>
+                  <a:schemeClr val="tx1"/>
+                </a:solidFill>
+              </a:rPr>
+              <a:t>    </a:t>
+            </a:r>
+            <a:r>
+              <a:rPr lang="zh-CN" altLang="en-US" sz="1600" b="1">
+                <a:solidFill>
+                  <a:schemeClr val="tx1"/>
+                </a:solidFill>
+              </a:rPr>
+              <a:t>全文总结</a:t>
+            </a:r>
+            <a:r>
+              <a:rPr lang="en-US" altLang="zh-CN" sz="1600" b="1">
+                <a:solidFill>
+                  <a:schemeClr val="tx1"/>
+                </a:solidFill>
+              </a:rPr>
+              <a:t> </a:t>
+            </a:r>
+            <a:r>
+              <a:rPr lang="zh-CN" altLang="en-US" sz="1600" b="1">
+                <a:solidFill>
+                  <a:schemeClr val="tx1"/>
+                </a:solidFill>
+              </a:rPr>
+              <a:t>研究与</a:t>
+            </a:r>
+            <a:r>
+              <a:rPr lang="zh-CN" altLang="en-US" sz="1600" b="1">
+                <a:solidFill>
+                  <a:schemeClr val="tx1"/>
+                </a:solidFill>
+              </a:rPr>
+              <a:t>展望</a:t>
+            </a:r>
+            <a:endParaRPr lang="zh-CN" altLang="en-US" sz="1600" b="1">
+              <a:solidFill>
+                <a:schemeClr val="tx1"/>
+              </a:solidFill>
+            </a:endParaRPr>
+          </a:p>
+        </p:txBody>
+      </p:sp>
     </p:spTree>
   </p:cSld>
   <p:clrMapOvr>
